--- a/output/wordlabs-turn-3day.pptx
+++ b/output/wordlabs-turn-3day.pptx
@@ -6040,7 +6040,7 @@
                 <a:ea typeface="Calibri" pitchFamily="34" charset="-122"/>
                 <a:cs typeface="Calibri" pitchFamily="34" charset="-120"/>
               </a:rPr>
-              <a:t>After a long trip, it felt wonderful to </a:t>
+              <a:t>After the storm, the council worked hard to </a:t>
             </a:r>
             <a:pPr algn="l" indent="0" marL="0">
               <a:buNone/>
@@ -6057,7 +6057,7 @@
                 <a:ea typeface="Calibri" pitchFamily="34" charset="-122"/>
                 <a:cs typeface="Calibri" pitchFamily="34" charset="-120"/>
               </a:rPr>
-              <a:t>return</a:t>
+              <a:t>overturn</a:t>
             </a:r>
             <a:pPr algn="l" indent="0" marL="0">
               <a:buNone/>
@@ -6071,7 +6071,7 @@
                 <a:ea typeface="Calibri" pitchFamily="34" charset="-122"/>
                 <a:cs typeface="Calibri" pitchFamily="34" charset="-120"/>
               </a:rPr>
-              <a:t> home, and we noticed an </a:t>
+              <a:t> the fallen barriers and ensure a safe </a:t>
             </a:r>
             <a:pPr algn="l" indent="0" marL="0">
               <a:buNone/>
@@ -6088,7 +6088,7 @@
                 <a:ea typeface="Calibri" pitchFamily="34" charset="-122"/>
                 <a:cs typeface="Calibri" pitchFamily="34" charset="-120"/>
               </a:rPr>
-              <a:t>upturn</a:t>
+              <a:t>return</a:t>
             </a:r>
             <a:pPr algn="l" indent="0" marL="0">
               <a:buNone/>
@@ -6102,7 +6102,7 @@
                 <a:ea typeface="Calibri" pitchFamily="34" charset="-122"/>
                 <a:cs typeface="Calibri" pitchFamily="34" charset="-120"/>
               </a:rPr>
-              <a:t> in everyone's mood.</a:t>
+              <a:t> for all residents.</a:t>
             </a:r>
             <a:endParaRPr lang="en-US" sz="1800" dirty="0"/>
           </a:p>
@@ -6257,7 +6257,7 @@
                 <a:ea typeface="Trebuchet MS" pitchFamily="34" charset="-122"/>
                 <a:cs typeface="Trebuchet MS" pitchFamily="34" charset="-120"/>
               </a:rPr>
-              <a:t>return</a:t>
+              <a:t>overturn</a:t>
             </a:r>
             <a:endParaRPr lang="en-US" sz="1400" dirty="0"/>
           </a:p>
@@ -6385,7 +6385,7 @@
                 <a:ea typeface="Trebuchet MS" pitchFamily="34" charset="-122"/>
                 <a:cs typeface="Trebuchet MS" pitchFamily="34" charset="-120"/>
               </a:rPr>
-              <a:t>upturn</a:t>
+              <a:t>return</a:t>
             </a:r>
             <a:endParaRPr lang="en-US" sz="1400" dirty="0"/>
           </a:p>
@@ -6855,7 +6855,7 @@
                 <a:ea typeface="Trebuchet MS" pitchFamily="34" charset="-122"/>
                 <a:cs typeface="Trebuchet MS" pitchFamily="34" charset="-120"/>
               </a:rPr>
-              <a:t>return</a:t>
+              <a:t>overturn</a:t>
             </a:r>
             <a:endParaRPr lang="en-US" sz="2800" dirty="0"/>
           </a:p>
@@ -7682,7 +7682,7 @@
                 <a:ea typeface="Trebuchet MS" pitchFamily="34" charset="-122"/>
                 <a:cs typeface="Trebuchet MS" pitchFamily="34" charset="-120"/>
               </a:rPr>
-              <a:t>return</a:t>
+              <a:t>overturn</a:t>
             </a:r>
             <a:endParaRPr lang="en-US" sz="2800" dirty="0"/>
           </a:p>
@@ -7821,7 +7821,7 @@
                 <a:ea typeface="Trebuchet MS" pitchFamily="34" charset="-122"/>
                 <a:cs typeface="Trebuchet MS" pitchFamily="34" charset="-120"/>
               </a:rPr>
-              <a:t>re</a:t>
+              <a:t>over</a:t>
             </a:r>
             <a:endParaRPr lang="en-US" sz="1300" dirty="0"/>
           </a:p>
@@ -7860,7 +7860,7 @@
                 <a:ea typeface="Calibri" pitchFamily="34" charset="-122"/>
                 <a:cs typeface="Calibri" pitchFamily="34" charset="-120"/>
               </a:rPr>
-              <a:t>again, back</a:t>
+              <a:t>above or too much</a:t>
             </a:r>
             <a:endParaRPr lang="en-US" sz="850" dirty="0"/>
           </a:p>
@@ -8667,7 +8667,7 @@
                 <a:ea typeface="Trebuchet MS" pitchFamily="34" charset="-122"/>
                 <a:cs typeface="Trebuchet MS" pitchFamily="34" charset="-120"/>
               </a:rPr>
-              <a:t>return</a:t>
+              <a:t>overturn</a:t>
             </a:r>
             <a:endParaRPr lang="en-US" sz="2800" dirty="0"/>
           </a:p>
@@ -8806,7 +8806,7 @@
                 <a:ea typeface="Trebuchet MS" pitchFamily="34" charset="-122"/>
                 <a:cs typeface="Trebuchet MS" pitchFamily="34" charset="-120"/>
               </a:rPr>
-              <a:t>re</a:t>
+              <a:t>over</a:t>
             </a:r>
             <a:endParaRPr lang="en-US" sz="1300" dirty="0"/>
           </a:p>
@@ -8845,7 +8845,7 @@
                 <a:ea typeface="Calibri" pitchFamily="34" charset="-122"/>
                 <a:cs typeface="Calibri" pitchFamily="34" charset="-120"/>
               </a:rPr>
-              <a:t>again, back</a:t>
+              <a:t>above or too much</a:t>
             </a:r>
             <a:endParaRPr lang="en-US" sz="850" dirty="0"/>
           </a:p>
@@ -9064,7 +9064,7 @@
         </p:nvSpPr>
         <p:spPr>
           <a:xfrm>
-            <a:off x="2999232" y="3364992"/>
+            <a:off x="2313432" y="3364992"/>
             <a:ext cx="1645920" cy="475488"/>
           </a:xfrm>
           <a:prstGeom prst="rect">
@@ -9091,7 +9091,7 @@
         </p:nvSpPr>
         <p:spPr>
           <a:xfrm>
-            <a:off x="2999232" y="3364992"/>
+            <a:off x="2313432" y="3364992"/>
             <a:ext cx="1645920" cy="475488"/>
           </a:xfrm>
           <a:prstGeom prst="rect">
@@ -9116,7 +9116,7 @@
                 <a:ea typeface="Trebuchet MS" pitchFamily="34" charset="-122"/>
                 <a:cs typeface="Trebuchet MS" pitchFamily="34" charset="-120"/>
               </a:rPr>
-              <a:t>re</a:t>
+              <a:t>o</a:t>
             </a:r>
             <a:endParaRPr lang="en-US" sz="1400" dirty="0"/>
           </a:p>
@@ -9130,8 +9130,8 @@
         </p:nvSpPr>
         <p:spPr>
           <a:xfrm>
-            <a:off x="4645152" y="3364992"/>
-            <a:ext cx="1097280" cy="475488"/>
+            <a:off x="3959352" y="3364992"/>
+            <a:ext cx="411480" cy="475488"/>
           </a:xfrm>
           <a:prstGeom prst="rect">
             <a:avLst/>
@@ -9169,7 +9169,7 @@
         </p:nvSpPr>
         <p:spPr>
           <a:xfrm>
-            <a:off x="5742432" y="3364992"/>
+            <a:off x="4370832" y="3364992"/>
             <a:ext cx="1645920" cy="475488"/>
           </a:xfrm>
           <a:prstGeom prst="rect">
@@ -9196,7 +9196,7 @@
         </p:nvSpPr>
         <p:spPr>
           <a:xfrm>
-            <a:off x="5742432" y="3364992"/>
+            <a:off x="4370832" y="3364992"/>
             <a:ext cx="1645920" cy="475488"/>
           </a:xfrm>
           <a:prstGeom prst="rect">
@@ -9221,6 +9221,111 @@
                 <a:ea typeface="Trebuchet MS" pitchFamily="34" charset="-122"/>
                 <a:cs typeface="Trebuchet MS" pitchFamily="34" charset="-120"/>
               </a:rPr>
+              <a:t>ver</a:t>
+            </a:r>
+            <a:endParaRPr lang="en-US" sz="1400" dirty="0"/>
+          </a:p>
+        </p:txBody>
+      </p:sp>
+      <p:sp>
+        <p:nvSpPr>
+          <p:cNvPr id="30" name="Text 28"/>
+          <p:cNvSpPr/>
+          <p:nvPr/>
+        </p:nvSpPr>
+        <p:spPr>
+          <a:xfrm>
+            <a:off x="6016752" y="3364992"/>
+            <a:ext cx="411480" cy="475488"/>
+          </a:xfrm>
+          <a:prstGeom prst="rect">
+            <a:avLst/>
+          </a:prstGeom>
+          <a:noFill/>
+          <a:ln/>
+        </p:spPr>
+        <p:txBody>
+          <a:bodyPr wrap="square" lIns="0" tIns="0" rIns="0" bIns="0" rtlCol="0" anchor="ctr"/>
+          <a:lstStyle/>
+          <a:p>
+            <a:pPr algn="ctr" indent="0" marL="0">
+              <a:buNone/>
+            </a:pPr>
+            <a:r>
+              <a:rPr lang="en-US" sz="1600" b="1" dirty="0">
+                <a:solidFill>
+                  <a:srgbClr val="0D9488"/>
+                </a:solidFill>
+                <a:latin typeface="Trebuchet MS" pitchFamily="34" charset="0"/>
+                <a:ea typeface="Trebuchet MS" pitchFamily="34" charset="-122"/>
+                <a:cs typeface="Trebuchet MS" pitchFamily="34" charset="-120"/>
+              </a:rPr>
+              <a:t>·</a:t>
+            </a:r>
+            <a:endParaRPr lang="en-US" sz="1600" dirty="0"/>
+          </a:p>
+        </p:txBody>
+      </p:sp>
+      <p:sp>
+        <p:nvSpPr>
+          <p:cNvPr id="31" name="Shape 29"/>
+          <p:cNvSpPr/>
+          <p:nvPr/>
+        </p:nvSpPr>
+        <p:spPr>
+          <a:xfrm>
+            <a:off x="6428232" y="3364992"/>
+            <a:ext cx="1645920" cy="475488"/>
+          </a:xfrm>
+          <a:prstGeom prst="rect">
+            <a:avLst>
+              <a:gd name="adj" fmla="val 9615"/>
+            </a:avLst>
+          </a:prstGeom>
+          <a:solidFill>
+            <a:srgbClr val="FFFFFF"/>
+          </a:solidFill>
+          <a:ln w="12700">
+            <a:solidFill>
+              <a:srgbClr val="0D9488"/>
+            </a:solidFill>
+            <a:prstDash val="solid"/>
+          </a:ln>
+        </p:spPr>
+      </p:sp>
+      <p:sp>
+        <p:nvSpPr>
+          <p:cNvPr id="32" name="Text 30"/>
+          <p:cNvSpPr/>
+          <p:nvPr/>
+        </p:nvSpPr>
+        <p:spPr>
+          <a:xfrm>
+            <a:off x="6428232" y="3364992"/>
+            <a:ext cx="1645920" cy="475488"/>
+          </a:xfrm>
+          <a:prstGeom prst="rect">
+            <a:avLst/>
+          </a:prstGeom>
+          <a:noFill/>
+          <a:ln/>
+        </p:spPr>
+        <p:txBody>
+          <a:bodyPr wrap="square" lIns="0" tIns="0" rIns="0" bIns="0" rtlCol="0" anchor="ctr"/>
+          <a:lstStyle/>
+          <a:p>
+            <a:pPr algn="ctr" indent="0" marL="0">
+              <a:buNone/>
+            </a:pPr>
+            <a:r>
+              <a:rPr lang="en-US" sz="1400" b="1" dirty="0">
+                <a:solidFill>
+                  <a:srgbClr val="0D9488"/>
+                </a:solidFill>
+                <a:latin typeface="Trebuchet MS" pitchFamily="34" charset="0"/>
+                <a:ea typeface="Trebuchet MS" pitchFamily="34" charset="-122"/>
+                <a:cs typeface="Trebuchet MS" pitchFamily="34" charset="-120"/>
+              </a:rPr>
               <a:t>turn</a:t>
             </a:r>
             <a:endParaRPr lang="en-US" sz="1400" dirty="0"/>
@@ -9229,7 +9334,7 @@
       </p:sp>
       <p:sp>
         <p:nvSpPr>
-          <p:cNvPr id="30" name="Shape 28"/>
+          <p:cNvPr id="33" name="Shape 31"/>
           <p:cNvSpPr/>
           <p:nvPr/>
         </p:nvSpPr>
@@ -9256,7 +9361,7 @@
       </p:sp>
       <p:sp>
         <p:nvSpPr>
-          <p:cNvPr id="31" name="Text 29"/>
+          <p:cNvPr id="34" name="Text 32"/>
           <p:cNvSpPr/>
           <p:nvPr/>
         </p:nvSpPr>
@@ -9295,7 +9400,7 @@
       </p:sp>
       <p:sp>
         <p:nvSpPr>
-          <p:cNvPr id="32" name="Shape 30"/>
+          <p:cNvPr id="35" name="Shape 33"/>
           <p:cNvSpPr/>
           <p:nvPr/>
         </p:nvSpPr>
@@ -9322,7 +9427,7 @@
       </p:sp>
       <p:sp>
         <p:nvSpPr>
-          <p:cNvPr id="33" name="Text 31"/>
+          <p:cNvPr id="36" name="Text 34"/>
           <p:cNvSpPr/>
           <p:nvPr/>
         </p:nvSpPr>
@@ -9784,7 +9889,7 @@
                 <a:ea typeface="Trebuchet MS" pitchFamily="34" charset="-122"/>
                 <a:cs typeface="Trebuchet MS" pitchFamily="34" charset="-120"/>
               </a:rPr>
-              <a:t>return</a:t>
+              <a:t>overturn</a:t>
             </a:r>
             <a:endParaRPr lang="en-US" sz="2800" dirty="0"/>
           </a:p>
@@ -9923,7 +10028,7 @@
                 <a:ea typeface="Trebuchet MS" pitchFamily="34" charset="-122"/>
                 <a:cs typeface="Trebuchet MS" pitchFamily="34" charset="-120"/>
               </a:rPr>
-              <a:t>re</a:t>
+              <a:t>over</a:t>
             </a:r>
             <a:endParaRPr lang="en-US" sz="1300" dirty="0"/>
           </a:p>
@@ -9962,7 +10067,7 @@
                 <a:ea typeface="Calibri" pitchFamily="34" charset="-122"/>
                 <a:cs typeface="Calibri" pitchFamily="34" charset="-120"/>
               </a:rPr>
-              <a:t>again, back</a:t>
+              <a:t>above or too much</a:t>
             </a:r>
             <a:endParaRPr lang="en-US" sz="850" dirty="0"/>
           </a:p>
@@ -10181,7 +10286,7 @@
         </p:nvSpPr>
         <p:spPr>
           <a:xfrm>
-            <a:off x="2999232" y="3364992"/>
+            <a:off x="2313432" y="3364992"/>
             <a:ext cx="1645920" cy="475488"/>
           </a:xfrm>
           <a:prstGeom prst="rect">
@@ -10208,7 +10313,7 @@
         </p:nvSpPr>
         <p:spPr>
           <a:xfrm>
-            <a:off x="2999232" y="3364992"/>
+            <a:off x="2313432" y="3364992"/>
             <a:ext cx="1645920" cy="475488"/>
           </a:xfrm>
           <a:prstGeom prst="rect">
@@ -10233,7 +10338,7 @@
                 <a:ea typeface="Trebuchet MS" pitchFamily="34" charset="-122"/>
                 <a:cs typeface="Trebuchet MS" pitchFamily="34" charset="-120"/>
               </a:rPr>
-              <a:t>re</a:t>
+              <a:t>o</a:t>
             </a:r>
             <a:endParaRPr lang="en-US" sz="1400" dirty="0"/>
           </a:p>
@@ -10247,8 +10352,8 @@
         </p:nvSpPr>
         <p:spPr>
           <a:xfrm>
-            <a:off x="4645152" y="3364992"/>
-            <a:ext cx="1097280" cy="475488"/>
+            <a:off x="3959352" y="3364992"/>
+            <a:ext cx="411480" cy="475488"/>
           </a:xfrm>
           <a:prstGeom prst="rect">
             <a:avLst/>
@@ -10286,7 +10391,7 @@
         </p:nvSpPr>
         <p:spPr>
           <a:xfrm>
-            <a:off x="5742432" y="3364992"/>
+            <a:off x="4370832" y="3364992"/>
             <a:ext cx="1645920" cy="475488"/>
           </a:xfrm>
           <a:prstGeom prst="rect">
@@ -10313,7 +10418,7 @@
         </p:nvSpPr>
         <p:spPr>
           <a:xfrm>
-            <a:off x="5742432" y="3364992"/>
+            <a:off x="4370832" y="3364992"/>
             <a:ext cx="1645920" cy="475488"/>
           </a:xfrm>
           <a:prstGeom prst="rect">
@@ -10338,6 +10443,111 @@
                 <a:ea typeface="Trebuchet MS" pitchFamily="34" charset="-122"/>
                 <a:cs typeface="Trebuchet MS" pitchFamily="34" charset="-120"/>
               </a:rPr>
+              <a:t>ver</a:t>
+            </a:r>
+            <a:endParaRPr lang="en-US" sz="1400" dirty="0"/>
+          </a:p>
+        </p:txBody>
+      </p:sp>
+      <p:sp>
+        <p:nvSpPr>
+          <p:cNvPr id="30" name="Text 28"/>
+          <p:cNvSpPr/>
+          <p:nvPr/>
+        </p:nvSpPr>
+        <p:spPr>
+          <a:xfrm>
+            <a:off x="6016752" y="3364992"/>
+            <a:ext cx="411480" cy="475488"/>
+          </a:xfrm>
+          <a:prstGeom prst="rect">
+            <a:avLst/>
+          </a:prstGeom>
+          <a:noFill/>
+          <a:ln/>
+        </p:spPr>
+        <p:txBody>
+          <a:bodyPr wrap="square" lIns="0" tIns="0" rIns="0" bIns="0" rtlCol="0" anchor="ctr"/>
+          <a:lstStyle/>
+          <a:p>
+            <a:pPr algn="ctr" indent="0" marL="0">
+              <a:buNone/>
+            </a:pPr>
+            <a:r>
+              <a:rPr lang="en-US" sz="1600" b="1" dirty="0">
+                <a:solidFill>
+                  <a:srgbClr val="0D9488"/>
+                </a:solidFill>
+                <a:latin typeface="Trebuchet MS" pitchFamily="34" charset="0"/>
+                <a:ea typeface="Trebuchet MS" pitchFamily="34" charset="-122"/>
+                <a:cs typeface="Trebuchet MS" pitchFamily="34" charset="-120"/>
+              </a:rPr>
+              <a:t>·</a:t>
+            </a:r>
+            <a:endParaRPr lang="en-US" sz="1600" dirty="0"/>
+          </a:p>
+        </p:txBody>
+      </p:sp>
+      <p:sp>
+        <p:nvSpPr>
+          <p:cNvPr id="31" name="Shape 29"/>
+          <p:cNvSpPr/>
+          <p:nvPr/>
+        </p:nvSpPr>
+        <p:spPr>
+          <a:xfrm>
+            <a:off x="6428232" y="3364992"/>
+            <a:ext cx="1645920" cy="475488"/>
+          </a:xfrm>
+          <a:prstGeom prst="rect">
+            <a:avLst>
+              <a:gd name="adj" fmla="val 9615"/>
+            </a:avLst>
+          </a:prstGeom>
+          <a:solidFill>
+            <a:srgbClr val="FFFFFF"/>
+          </a:solidFill>
+          <a:ln w="12700">
+            <a:solidFill>
+              <a:srgbClr val="0D9488"/>
+            </a:solidFill>
+            <a:prstDash val="solid"/>
+          </a:ln>
+        </p:spPr>
+      </p:sp>
+      <p:sp>
+        <p:nvSpPr>
+          <p:cNvPr id="32" name="Text 30"/>
+          <p:cNvSpPr/>
+          <p:nvPr/>
+        </p:nvSpPr>
+        <p:spPr>
+          <a:xfrm>
+            <a:off x="6428232" y="3364992"/>
+            <a:ext cx="1645920" cy="475488"/>
+          </a:xfrm>
+          <a:prstGeom prst="rect">
+            <a:avLst/>
+          </a:prstGeom>
+          <a:noFill/>
+          <a:ln/>
+        </p:spPr>
+        <p:txBody>
+          <a:bodyPr wrap="square" lIns="0" tIns="0" rIns="0" bIns="0" rtlCol="0" anchor="ctr"/>
+          <a:lstStyle/>
+          <a:p>
+            <a:pPr algn="ctr" indent="0" marL="0">
+              <a:buNone/>
+            </a:pPr>
+            <a:r>
+              <a:rPr lang="en-US" sz="1400" b="1" dirty="0">
+                <a:solidFill>
+                  <a:srgbClr val="0D9488"/>
+                </a:solidFill>
+                <a:latin typeface="Trebuchet MS" pitchFamily="34" charset="0"/>
+                <a:ea typeface="Trebuchet MS" pitchFamily="34" charset="-122"/>
+                <a:cs typeface="Trebuchet MS" pitchFamily="34" charset="-120"/>
+              </a:rPr>
               <a:t>turn</a:t>
             </a:r>
             <a:endParaRPr lang="en-US" sz="1400" dirty="0"/>
@@ -10346,7 +10556,7 @@
       </p:sp>
       <p:sp>
         <p:nvSpPr>
-          <p:cNvPr id="30" name="Shape 28"/>
+          <p:cNvPr id="33" name="Shape 31"/>
           <p:cNvSpPr/>
           <p:nvPr/>
         </p:nvSpPr>
@@ -10373,7 +10583,7 @@
       </p:sp>
       <p:sp>
         <p:nvSpPr>
-          <p:cNvPr id="31" name="Text 29"/>
+          <p:cNvPr id="34" name="Text 32"/>
           <p:cNvSpPr/>
           <p:nvPr/>
         </p:nvSpPr>
@@ -10412,7 +10622,7 @@
       </p:sp>
       <p:sp>
         <p:nvSpPr>
-          <p:cNvPr id="32" name="Shape 30"/>
+          <p:cNvPr id="35" name="Shape 33"/>
           <p:cNvSpPr/>
           <p:nvPr/>
         </p:nvSpPr>
@@ -10439,13 +10649,13 @@
       </p:sp>
       <p:sp>
         <p:nvSpPr>
-          <p:cNvPr id="33" name="Shape 31"/>
-          <p:cNvSpPr/>
-          <p:nvPr/>
-        </p:nvSpPr>
-        <p:spPr>
-          <a:xfrm>
-            <a:off x="2427732" y="4169664"/>
+          <p:cNvPr id="36" name="Shape 34"/>
+          <p:cNvSpPr/>
+          <p:nvPr/>
+        </p:nvSpPr>
+        <p:spPr>
+          <a:xfrm>
+            <a:off x="2254649" y="4169664"/>
             <a:ext cx="685800" cy="475488"/>
           </a:xfrm>
           <a:prstGeom prst="rect">
@@ -10466,13 +10676,13 @@
       </p:sp>
       <p:sp>
         <p:nvSpPr>
-          <p:cNvPr id="34" name="Text 32"/>
-          <p:cNvSpPr/>
-          <p:nvPr/>
-        </p:nvSpPr>
-        <p:spPr>
-          <a:xfrm>
-            <a:off x="2427732" y="4169664"/>
+          <p:cNvPr id="37" name="Text 35"/>
+          <p:cNvSpPr/>
+          <p:nvPr/>
+        </p:nvSpPr>
+        <p:spPr>
+          <a:xfrm>
+            <a:off x="2254649" y="4169664"/>
             <a:ext cx="685800" cy="475488"/>
           </a:xfrm>
           <a:prstGeom prst="rect">
@@ -10497,7 +10707,7 @@
                 <a:ea typeface="Trebuchet MS" pitchFamily="34" charset="-122"/>
                 <a:cs typeface="Trebuchet MS" pitchFamily="34" charset="-120"/>
               </a:rPr>
-              <a:t>r</a:t>
+              <a:t>o</a:t>
             </a:r>
             <a:endParaRPr lang="en-US" sz="900" dirty="0"/>
           </a:p>
@@ -10505,13 +10715,13 @@
       </p:sp>
       <p:sp>
         <p:nvSpPr>
-          <p:cNvPr id="35" name="Shape 33"/>
-          <p:cNvSpPr/>
-          <p:nvPr/>
-        </p:nvSpPr>
-        <p:spPr>
-          <a:xfrm>
-            <a:off x="3639312" y="4169664"/>
+          <p:cNvPr id="38" name="Shape 36"/>
+          <p:cNvSpPr/>
+          <p:nvPr/>
+        </p:nvSpPr>
+        <p:spPr>
+          <a:xfrm>
+            <a:off x="3293146" y="4169664"/>
             <a:ext cx="685800" cy="475488"/>
           </a:xfrm>
           <a:prstGeom prst="rect">
@@ -10532,13 +10742,13 @@
       </p:sp>
       <p:sp>
         <p:nvSpPr>
-          <p:cNvPr id="36" name="Text 34"/>
-          <p:cNvSpPr/>
-          <p:nvPr/>
-        </p:nvSpPr>
-        <p:spPr>
-          <a:xfrm>
-            <a:off x="3639312" y="4169664"/>
+          <p:cNvPr id="39" name="Text 37"/>
+          <p:cNvSpPr/>
+          <p:nvPr/>
+        </p:nvSpPr>
+        <p:spPr>
+          <a:xfrm>
+            <a:off x="3293146" y="4169664"/>
             <a:ext cx="685800" cy="475488"/>
           </a:xfrm>
           <a:prstGeom prst="rect">
@@ -10563,7 +10773,7 @@
                 <a:ea typeface="Trebuchet MS" pitchFamily="34" charset="-122"/>
                 <a:cs typeface="Trebuchet MS" pitchFamily="34" charset="-120"/>
               </a:rPr>
-              <a:t>e</a:t>
+              <a:t>v</a:t>
             </a:r>
             <a:endParaRPr lang="en-US" sz="900" dirty="0"/>
           </a:p>
@@ -10571,13 +10781,13 @@
       </p:sp>
       <p:sp>
         <p:nvSpPr>
-          <p:cNvPr id="37" name="Shape 35"/>
-          <p:cNvSpPr/>
-          <p:nvPr/>
-        </p:nvSpPr>
-        <p:spPr>
-          <a:xfrm>
-            <a:off x="4850892" y="4169664"/>
+          <p:cNvPr id="40" name="Shape 38"/>
+          <p:cNvSpPr/>
+          <p:nvPr/>
+        </p:nvSpPr>
+        <p:spPr>
+          <a:xfrm>
+            <a:off x="4331643" y="4169664"/>
             <a:ext cx="685800" cy="475488"/>
           </a:xfrm>
           <a:prstGeom prst="rect">
@@ -10598,13 +10808,13 @@
       </p:sp>
       <p:sp>
         <p:nvSpPr>
-          <p:cNvPr id="38" name="Text 36"/>
-          <p:cNvSpPr/>
-          <p:nvPr/>
-        </p:nvSpPr>
-        <p:spPr>
-          <a:xfrm>
-            <a:off x="4850892" y="4169664"/>
+          <p:cNvPr id="41" name="Text 39"/>
+          <p:cNvSpPr/>
+          <p:nvPr/>
+        </p:nvSpPr>
+        <p:spPr>
+          <a:xfrm>
+            <a:off x="4331643" y="4169664"/>
             <a:ext cx="685800" cy="475488"/>
           </a:xfrm>
           <a:prstGeom prst="rect">
@@ -10629,7 +10839,7 @@
                 <a:ea typeface="Trebuchet MS" pitchFamily="34" charset="-122"/>
                 <a:cs typeface="Trebuchet MS" pitchFamily="34" charset="-120"/>
               </a:rPr>
-              <a:t>t</a:t>
+              <a:t>er</a:t>
             </a:r>
             <a:endParaRPr lang="en-US" sz="900" dirty="0"/>
           </a:p>
@@ -10637,13 +10847,13 @@
       </p:sp>
       <p:sp>
         <p:nvSpPr>
-          <p:cNvPr id="39" name="Shape 37"/>
-          <p:cNvSpPr/>
-          <p:nvPr/>
-        </p:nvSpPr>
-        <p:spPr>
-          <a:xfrm>
-            <a:off x="6062472" y="4169664"/>
+          <p:cNvPr id="42" name="Shape 40"/>
+          <p:cNvSpPr/>
+          <p:nvPr/>
+        </p:nvSpPr>
+        <p:spPr>
+          <a:xfrm>
+            <a:off x="5370141" y="4169664"/>
             <a:ext cx="685800" cy="475488"/>
           </a:xfrm>
           <a:prstGeom prst="rect">
@@ -10664,13 +10874,13 @@
       </p:sp>
       <p:sp>
         <p:nvSpPr>
-          <p:cNvPr id="40" name="Text 38"/>
-          <p:cNvSpPr/>
-          <p:nvPr/>
-        </p:nvSpPr>
-        <p:spPr>
-          <a:xfrm>
-            <a:off x="6062472" y="4169664"/>
+          <p:cNvPr id="43" name="Text 41"/>
+          <p:cNvSpPr/>
+          <p:nvPr/>
+        </p:nvSpPr>
+        <p:spPr>
+          <a:xfrm>
+            <a:off x="5370141" y="4169664"/>
             <a:ext cx="685800" cy="475488"/>
           </a:xfrm>
           <a:prstGeom prst="rect">
@@ -10695,7 +10905,7 @@
                 <a:ea typeface="Trebuchet MS" pitchFamily="34" charset="-122"/>
                 <a:cs typeface="Trebuchet MS" pitchFamily="34" charset="-120"/>
               </a:rPr>
-              <a:t>ur</a:t>
+              <a:t>t</a:t>
             </a:r>
             <a:endParaRPr lang="en-US" sz="900" dirty="0"/>
           </a:p>
@@ -10703,13 +10913,13 @@
       </p:sp>
       <p:sp>
         <p:nvSpPr>
-          <p:cNvPr id="41" name="Shape 39"/>
-          <p:cNvSpPr/>
-          <p:nvPr/>
-        </p:nvSpPr>
-        <p:spPr>
-          <a:xfrm>
-            <a:off x="7274052" y="4169664"/>
+          <p:cNvPr id="44" name="Shape 42"/>
+          <p:cNvSpPr/>
+          <p:nvPr/>
+        </p:nvSpPr>
+        <p:spPr>
+          <a:xfrm>
+            <a:off x="6408638" y="4169664"/>
             <a:ext cx="685800" cy="475488"/>
           </a:xfrm>
           <a:prstGeom prst="rect">
@@ -10730,13 +10940,79 @@
       </p:sp>
       <p:sp>
         <p:nvSpPr>
-          <p:cNvPr id="42" name="Text 40"/>
-          <p:cNvSpPr/>
-          <p:nvPr/>
-        </p:nvSpPr>
-        <p:spPr>
-          <a:xfrm>
-            <a:off x="7274052" y="4169664"/>
+          <p:cNvPr id="45" name="Text 43"/>
+          <p:cNvSpPr/>
+          <p:nvPr/>
+        </p:nvSpPr>
+        <p:spPr>
+          <a:xfrm>
+            <a:off x="6408638" y="4169664"/>
+            <a:ext cx="685800" cy="475488"/>
+          </a:xfrm>
+          <a:prstGeom prst="rect">
+            <a:avLst/>
+          </a:prstGeom>
+          <a:noFill/>
+          <a:ln/>
+        </p:spPr>
+        <p:txBody>
+          <a:bodyPr wrap="square" lIns="0" tIns="0" rIns="0" bIns="0" rtlCol="0" anchor="ctr"/>
+          <a:lstStyle/>
+          <a:p>
+            <a:pPr algn="ctr" indent="0" marL="0">
+              <a:buNone/>
+            </a:pPr>
+            <a:r>
+              <a:rPr lang="en-US" sz="900" b="1" dirty="0">
+                <a:solidFill>
+                  <a:srgbClr val="9D174D"/>
+                </a:solidFill>
+                <a:latin typeface="Trebuchet MS" pitchFamily="34" charset="0"/>
+                <a:ea typeface="Trebuchet MS" pitchFamily="34" charset="-122"/>
+                <a:cs typeface="Trebuchet MS" pitchFamily="34" charset="-120"/>
+              </a:rPr>
+              <a:t>ur</a:t>
+            </a:r>
+            <a:endParaRPr lang="en-US" sz="900" dirty="0"/>
+          </a:p>
+        </p:txBody>
+      </p:sp>
+      <p:sp>
+        <p:nvSpPr>
+          <p:cNvPr id="46" name="Shape 44"/>
+          <p:cNvSpPr/>
+          <p:nvPr/>
+        </p:nvSpPr>
+        <p:spPr>
+          <a:xfrm>
+            <a:off x="7447135" y="4169664"/>
+            <a:ext cx="685800" cy="475488"/>
+          </a:xfrm>
+          <a:prstGeom prst="rect">
+            <a:avLst>
+              <a:gd name="adj" fmla="val 7692"/>
+            </a:avLst>
+          </a:prstGeom>
+          <a:solidFill>
+            <a:srgbClr val="FFFFFF"/>
+          </a:solidFill>
+          <a:ln w="12700">
+            <a:solidFill>
+              <a:srgbClr val="DB2777"/>
+            </a:solidFill>
+            <a:prstDash val="solid"/>
+          </a:ln>
+        </p:spPr>
+      </p:sp>
+      <p:sp>
+        <p:nvSpPr>
+          <p:cNvPr id="47" name="Text 45"/>
+          <p:cNvSpPr/>
+          <p:nvPr/>
+        </p:nvSpPr>
+        <p:spPr>
+          <a:xfrm>
+            <a:off x="7447135" y="4169664"/>
             <a:ext cx="685800" cy="475488"/>
           </a:xfrm>
           <a:prstGeom prst="rect">
@@ -11192,7 +11468,7 @@
                 <a:ea typeface="Trebuchet MS" pitchFamily="34" charset="-122"/>
                 <a:cs typeface="Trebuchet MS" pitchFamily="34" charset="-120"/>
               </a:rPr>
-              <a:t>upturn</a:t>
+              <a:t>return</a:t>
             </a:r>
             <a:endParaRPr lang="en-US" sz="2800" dirty="0"/>
           </a:p>
@@ -12019,7 +12295,7 @@
                 <a:ea typeface="Trebuchet MS" pitchFamily="34" charset="-122"/>
                 <a:cs typeface="Trebuchet MS" pitchFamily="34" charset="-120"/>
               </a:rPr>
-              <a:t>upturn</a:t>
+              <a:t>return</a:t>
             </a:r>
             <a:endParaRPr lang="en-US" sz="2800" dirty="0"/>
           </a:p>
@@ -12158,7 +12434,7 @@
                 <a:ea typeface="Trebuchet MS" pitchFamily="34" charset="-122"/>
                 <a:cs typeface="Trebuchet MS" pitchFamily="34" charset="-120"/>
               </a:rPr>
-              <a:t>up</a:t>
+              <a:t>re</a:t>
             </a:r>
             <a:endParaRPr lang="en-US" sz="1300" dirty="0"/>
           </a:p>
@@ -12197,7 +12473,7 @@
                 <a:ea typeface="Calibri" pitchFamily="34" charset="-122"/>
                 <a:cs typeface="Calibri" pitchFamily="34" charset="-120"/>
               </a:rPr>
-              <a:t>upward, higher</a:t>
+              <a:t>again or back</a:t>
             </a:r>
             <a:endParaRPr lang="en-US" sz="850" dirty="0"/>
           </a:p>
@@ -13004,7 +13280,7 @@
                 <a:ea typeface="Trebuchet MS" pitchFamily="34" charset="-122"/>
                 <a:cs typeface="Trebuchet MS" pitchFamily="34" charset="-120"/>
               </a:rPr>
-              <a:t>upturn</a:t>
+              <a:t>return</a:t>
             </a:r>
             <a:endParaRPr lang="en-US" sz="2800" dirty="0"/>
           </a:p>
@@ -13143,7 +13419,7 @@
                 <a:ea typeface="Trebuchet MS" pitchFamily="34" charset="-122"/>
                 <a:cs typeface="Trebuchet MS" pitchFamily="34" charset="-120"/>
               </a:rPr>
-              <a:t>up</a:t>
+              <a:t>re</a:t>
             </a:r>
             <a:endParaRPr lang="en-US" sz="1300" dirty="0"/>
           </a:p>
@@ -13182,7 +13458,7 @@
                 <a:ea typeface="Calibri" pitchFamily="34" charset="-122"/>
                 <a:cs typeface="Calibri" pitchFamily="34" charset="-120"/>
               </a:rPr>
-              <a:t>upward, higher</a:t>
+              <a:t>again or back</a:t>
             </a:r>
             <a:endParaRPr lang="en-US" sz="850" dirty="0"/>
           </a:p>
@@ -13453,7 +13729,7 @@
                 <a:ea typeface="Trebuchet MS" pitchFamily="34" charset="-122"/>
                 <a:cs typeface="Trebuchet MS" pitchFamily="34" charset="-120"/>
               </a:rPr>
-              <a:t>up</a:t>
+              <a:t>re</a:t>
             </a:r>
             <a:endParaRPr lang="en-US" sz="1400" dirty="0"/>
           </a:p>
@@ -14386,7 +14662,7 @@
                 <a:ea typeface="Trebuchet MS" pitchFamily="34" charset="-122"/>
                 <a:cs typeface="Trebuchet MS" pitchFamily="34" charset="-120"/>
               </a:rPr>
-              <a:t>upturn</a:t>
+              <a:t>return</a:t>
             </a:r>
             <a:endParaRPr lang="en-US" sz="2800" dirty="0"/>
           </a:p>
@@ -14525,7 +14801,7 @@
                 <a:ea typeface="Trebuchet MS" pitchFamily="34" charset="-122"/>
                 <a:cs typeface="Trebuchet MS" pitchFamily="34" charset="-120"/>
               </a:rPr>
-              <a:t>up</a:t>
+              <a:t>re</a:t>
             </a:r>
             <a:endParaRPr lang="en-US" sz="1300" dirty="0"/>
           </a:p>
@@ -14564,7 +14840,7 @@
                 <a:ea typeface="Calibri" pitchFamily="34" charset="-122"/>
                 <a:cs typeface="Calibri" pitchFamily="34" charset="-120"/>
               </a:rPr>
-              <a:t>upward, higher</a:t>
+              <a:t>again or back</a:t>
             </a:r>
             <a:endParaRPr lang="en-US" sz="850" dirty="0"/>
           </a:p>
@@ -14835,7 +15111,7 @@
                 <a:ea typeface="Trebuchet MS" pitchFamily="34" charset="-122"/>
                 <a:cs typeface="Trebuchet MS" pitchFamily="34" charset="-120"/>
               </a:rPr>
-              <a:t>up</a:t>
+              <a:t>re</a:t>
             </a:r>
             <a:endParaRPr lang="en-US" sz="1400" dirty="0"/>
           </a:p>
@@ -15099,7 +15375,7 @@
                 <a:ea typeface="Trebuchet MS" pitchFamily="34" charset="-122"/>
                 <a:cs typeface="Trebuchet MS" pitchFamily="34" charset="-120"/>
               </a:rPr>
-              <a:t>u</a:t>
+              <a:t>r</a:t>
             </a:r>
             <a:endParaRPr lang="en-US" sz="900" dirty="0"/>
           </a:p>
@@ -15165,7 +15441,7 @@
                 <a:ea typeface="Trebuchet MS" pitchFamily="34" charset="-122"/>
                 <a:cs typeface="Trebuchet MS" pitchFamily="34" charset="-120"/>
               </a:rPr>
-              <a:t>p</a:t>
+              <a:t>e</a:t>
             </a:r>
             <a:endParaRPr lang="en-US" sz="900" dirty="0"/>
           </a:p>
@@ -16689,7 +16965,7 @@
                 <a:ea typeface="Calibri" pitchFamily="34" charset="-122"/>
                 <a:cs typeface="Calibri" pitchFamily="34" charset="-120"/>
               </a:rPr>
-              <a:t>The </a:t>
+              <a:t>The enormous </a:t>
             </a:r>
             <a:pPr algn="l" indent="0" marL="0">
               <a:buNone/>
@@ -16706,7 +16982,7 @@
                 <a:ea typeface="Calibri" pitchFamily="34" charset="-122"/>
                 <a:cs typeface="Calibri" pitchFamily="34" charset="-120"/>
               </a:rPr>
-              <a:t>turning</a:t>
+              <a:t>turnout</a:t>
             </a:r>
             <a:pPr algn="l" indent="0" marL="0">
               <a:buNone/>
@@ -16720,7 +16996,7 @@
                 <a:ea typeface="Calibri" pitchFamily="34" charset="-122"/>
                 <a:cs typeface="Calibri" pitchFamily="34" charset="-120"/>
               </a:rPr>
-              <a:t> of the tide caused the boat to </a:t>
+              <a:t> at the rally surprised everyone; the </a:t>
             </a:r>
             <a:pPr algn="l" indent="0" marL="0">
               <a:buNone/>
@@ -16737,7 +17013,7 @@
                 <a:ea typeface="Calibri" pitchFamily="34" charset="-122"/>
                 <a:cs typeface="Calibri" pitchFamily="34" charset="-120"/>
               </a:rPr>
-              <a:t>overturn</a:t>
+              <a:t>turning</a:t>
             </a:r>
             <a:pPr algn="l" indent="0" marL="0">
               <a:buNone/>
@@ -16751,7 +17027,7 @@
                 <a:ea typeface="Calibri" pitchFamily="34" charset="-122"/>
                 <a:cs typeface="Calibri" pitchFamily="34" charset="-120"/>
               </a:rPr>
-              <a:t>, but luckily the crew managed a safe </a:t>
+              <a:t> point came when the speaker announced the exciting news, and each </a:t>
             </a:r>
             <a:pPr algn="l" indent="0" marL="0">
               <a:buNone/>
@@ -16768,7 +17044,7 @@
                 <a:ea typeface="Calibri" pitchFamily="34" charset="-122"/>
                 <a:cs typeface="Calibri" pitchFamily="34" charset="-120"/>
               </a:rPr>
-              <a:t>return</a:t>
+              <a:t>turner</a:t>
             </a:r>
             <a:pPr algn="l" indent="0" marL="0">
               <a:buNone/>
@@ -16782,7 +17058,7 @@
                 <a:ea typeface="Calibri" pitchFamily="34" charset="-122"/>
                 <a:cs typeface="Calibri" pitchFamily="34" charset="-120"/>
               </a:rPr>
-              <a:t> to shore.</a:t>
+              <a:t> in the crowd cheered loudly.</a:t>
             </a:r>
             <a:endParaRPr lang="en-US" sz="1800" dirty="0"/>
           </a:p>
@@ -16937,7 +17213,7 @@
                 <a:ea typeface="Trebuchet MS" pitchFamily="34" charset="-122"/>
                 <a:cs typeface="Trebuchet MS" pitchFamily="34" charset="-120"/>
               </a:rPr>
-              <a:t>turning</a:t>
+              <a:t>turnout</a:t>
             </a:r>
             <a:endParaRPr lang="en-US" sz="1400" dirty="0"/>
           </a:p>
@@ -17065,7 +17341,7 @@
                 <a:ea typeface="Trebuchet MS" pitchFamily="34" charset="-122"/>
                 <a:cs typeface="Trebuchet MS" pitchFamily="34" charset="-120"/>
               </a:rPr>
-              <a:t>overturn</a:t>
+              <a:t>turning</a:t>
             </a:r>
             <a:endParaRPr lang="en-US" sz="1400" dirty="0"/>
           </a:p>
@@ -17193,7 +17469,7 @@
                 <a:ea typeface="Trebuchet MS" pitchFamily="34" charset="-122"/>
                 <a:cs typeface="Trebuchet MS" pitchFamily="34" charset="-120"/>
               </a:rPr>
-              <a:t>return</a:t>
+              <a:t>turner</a:t>
             </a:r>
             <a:endParaRPr lang="en-US" sz="1400" dirty="0"/>
           </a:p>
@@ -17663,7 +17939,7 @@
                 <a:ea typeface="Trebuchet MS" pitchFamily="34" charset="-122"/>
                 <a:cs typeface="Trebuchet MS" pitchFamily="34" charset="-120"/>
               </a:rPr>
-              <a:t>turning</a:t>
+              <a:t>turnout</a:t>
             </a:r>
             <a:endParaRPr lang="en-US" sz="2800" dirty="0"/>
           </a:p>
@@ -18490,7 +18766,7 @@
                 <a:ea typeface="Trebuchet MS" pitchFamily="34" charset="-122"/>
                 <a:cs typeface="Trebuchet MS" pitchFamily="34" charset="-120"/>
               </a:rPr>
-              <a:t>turning</a:t>
+              <a:t>turnout</a:t>
             </a:r>
             <a:endParaRPr lang="en-US" sz="2800" dirty="0"/>
           </a:p>
@@ -18741,7 +19017,7 @@
                 <a:ea typeface="Trebuchet MS" pitchFamily="34" charset="-122"/>
                 <a:cs typeface="Trebuchet MS" pitchFamily="34" charset="-120"/>
               </a:rPr>
-              <a:t>ing</a:t>
+              <a:t>out</a:t>
             </a:r>
             <a:endParaRPr lang="en-US" sz="1300" dirty="0"/>
           </a:p>
@@ -18780,7 +19056,7 @@
                 <a:ea typeface="Calibri" pitchFamily="34" charset="-122"/>
                 <a:cs typeface="Calibri" pitchFamily="34" charset="-120"/>
               </a:rPr>
-              <a:t>ongoing action</a:t>
+              <a:t>away or outside</a:t>
             </a:r>
             <a:endParaRPr lang="en-US" sz="850" dirty="0"/>
           </a:p>
@@ -19475,7 +19751,7 @@
                 <a:ea typeface="Trebuchet MS" pitchFamily="34" charset="-122"/>
                 <a:cs typeface="Trebuchet MS" pitchFamily="34" charset="-120"/>
               </a:rPr>
-              <a:t>turning</a:t>
+              <a:t>turnout</a:t>
             </a:r>
             <a:endParaRPr lang="en-US" sz="2800" dirty="0"/>
           </a:p>
@@ -19726,7 +20002,7 @@
                 <a:ea typeface="Trebuchet MS" pitchFamily="34" charset="-122"/>
                 <a:cs typeface="Trebuchet MS" pitchFamily="34" charset="-120"/>
               </a:rPr>
-              <a:t>ing</a:t>
+              <a:t>out</a:t>
             </a:r>
             <a:endParaRPr lang="en-US" sz="1300" dirty="0"/>
           </a:p>
@@ -19765,7 +20041,7 @@
                 <a:ea typeface="Calibri" pitchFamily="34" charset="-122"/>
                 <a:cs typeface="Calibri" pitchFamily="34" charset="-120"/>
               </a:rPr>
-              <a:t>ongoing action</a:t>
+              <a:t>away or outside</a:t>
             </a:r>
             <a:endParaRPr lang="en-US" sz="850" dirty="0"/>
           </a:p>
@@ -20029,7 +20305,7 @@
                 <a:ea typeface="Trebuchet MS" pitchFamily="34" charset="-122"/>
                 <a:cs typeface="Trebuchet MS" pitchFamily="34" charset="-120"/>
               </a:rPr>
-              <a:t>ing</a:t>
+              <a:t>out</a:t>
             </a:r>
             <a:endParaRPr lang="en-US" sz="1400" dirty="0"/>
           </a:p>
@@ -20592,7 +20868,7 @@
                 <a:ea typeface="Trebuchet MS" pitchFamily="34" charset="-122"/>
                 <a:cs typeface="Trebuchet MS" pitchFamily="34" charset="-120"/>
               </a:rPr>
-              <a:t>turning</a:t>
+              <a:t>turnout</a:t>
             </a:r>
             <a:endParaRPr lang="en-US" sz="2800" dirty="0"/>
           </a:p>
@@ -20843,7 +21119,7 @@
                 <a:ea typeface="Trebuchet MS" pitchFamily="34" charset="-122"/>
                 <a:cs typeface="Trebuchet MS" pitchFamily="34" charset="-120"/>
               </a:rPr>
-              <a:t>ing</a:t>
+              <a:t>out</a:t>
             </a:r>
             <a:endParaRPr lang="en-US" sz="1300" dirty="0"/>
           </a:p>
@@ -20882,7 +21158,7 @@
                 <a:ea typeface="Calibri" pitchFamily="34" charset="-122"/>
                 <a:cs typeface="Calibri" pitchFamily="34" charset="-120"/>
               </a:rPr>
-              <a:t>ongoing action</a:t>
+              <a:t>away or outside</a:t>
             </a:r>
             <a:endParaRPr lang="en-US" sz="850" dirty="0"/>
           </a:p>
@@ -21146,7 +21422,7 @@
                 <a:ea typeface="Trebuchet MS" pitchFamily="34" charset="-122"/>
                 <a:cs typeface="Trebuchet MS" pitchFamily="34" charset="-120"/>
               </a:rPr>
-              <a:t>ing</a:t>
+              <a:t>out</a:t>
             </a:r>
             <a:endParaRPr lang="en-US" sz="1400" dirty="0"/>
           </a:p>
@@ -21253,7 +21529,7 @@
         </p:nvSpPr>
         <p:spPr>
           <a:xfrm>
-            <a:off x="2670048" y="4169664"/>
+            <a:off x="2427732" y="4169664"/>
             <a:ext cx="685800" cy="475488"/>
           </a:xfrm>
           <a:prstGeom prst="rect">
@@ -21280,7 +21556,7 @@
         </p:nvSpPr>
         <p:spPr>
           <a:xfrm>
-            <a:off x="2670048" y="4169664"/>
+            <a:off x="2427732" y="4169664"/>
             <a:ext cx="685800" cy="475488"/>
           </a:xfrm>
           <a:prstGeom prst="rect">
@@ -21319,7 +21595,7 @@
         </p:nvSpPr>
         <p:spPr>
           <a:xfrm>
-            <a:off x="4123944" y="4169664"/>
+            <a:off x="3639312" y="4169664"/>
             <a:ext cx="685800" cy="475488"/>
           </a:xfrm>
           <a:prstGeom prst="rect">
@@ -21346,7 +21622,7 @@
         </p:nvSpPr>
         <p:spPr>
           <a:xfrm>
-            <a:off x="4123944" y="4169664"/>
+            <a:off x="3639312" y="4169664"/>
             <a:ext cx="685800" cy="475488"/>
           </a:xfrm>
           <a:prstGeom prst="rect">
@@ -21385,7 +21661,7 @@
         </p:nvSpPr>
         <p:spPr>
           <a:xfrm>
-            <a:off x="5577840" y="4169664"/>
+            <a:off x="4850892" y="4169664"/>
             <a:ext cx="685800" cy="475488"/>
           </a:xfrm>
           <a:prstGeom prst="rect">
@@ -21412,7 +21688,7 @@
         </p:nvSpPr>
         <p:spPr>
           <a:xfrm>
-            <a:off x="5577840" y="4169664"/>
+            <a:off x="4850892" y="4169664"/>
             <a:ext cx="685800" cy="475488"/>
           </a:xfrm>
           <a:prstGeom prst="rect">
@@ -21451,7 +21727,7 @@
         </p:nvSpPr>
         <p:spPr>
           <a:xfrm>
-            <a:off x="7031736" y="4169664"/>
+            <a:off x="6062472" y="4169664"/>
             <a:ext cx="685800" cy="475488"/>
           </a:xfrm>
           <a:prstGeom prst="rect">
@@ -21478,7 +21754,7 @@
         </p:nvSpPr>
         <p:spPr>
           <a:xfrm>
-            <a:off x="7031736" y="4169664"/>
+            <a:off x="6062472" y="4169664"/>
             <a:ext cx="685800" cy="475488"/>
           </a:xfrm>
           <a:prstGeom prst="rect">
@@ -21503,7 +21779,73 @@
                 <a:ea typeface="Trebuchet MS" pitchFamily="34" charset="-122"/>
                 <a:cs typeface="Trebuchet MS" pitchFamily="34" charset="-120"/>
               </a:rPr>
-              <a:t>ing</a:t>
+              <a:t>ou</a:t>
+            </a:r>
+            <a:endParaRPr lang="en-US" sz="900" dirty="0"/>
+          </a:p>
+        </p:txBody>
+      </p:sp>
+      <p:sp>
+        <p:nvSpPr>
+          <p:cNvPr id="41" name="Shape 39"/>
+          <p:cNvSpPr/>
+          <p:nvPr/>
+        </p:nvSpPr>
+        <p:spPr>
+          <a:xfrm>
+            <a:off x="7274052" y="4169664"/>
+            <a:ext cx="685800" cy="475488"/>
+          </a:xfrm>
+          <a:prstGeom prst="rect">
+            <a:avLst>
+              <a:gd name="adj" fmla="val 7692"/>
+            </a:avLst>
+          </a:prstGeom>
+          <a:solidFill>
+            <a:srgbClr val="FFFFFF"/>
+          </a:solidFill>
+          <a:ln w="12700">
+            <a:solidFill>
+              <a:srgbClr val="DB2777"/>
+            </a:solidFill>
+            <a:prstDash val="solid"/>
+          </a:ln>
+        </p:spPr>
+      </p:sp>
+      <p:sp>
+        <p:nvSpPr>
+          <p:cNvPr id="42" name="Text 40"/>
+          <p:cNvSpPr/>
+          <p:nvPr/>
+        </p:nvSpPr>
+        <p:spPr>
+          <a:xfrm>
+            <a:off x="7274052" y="4169664"/>
+            <a:ext cx="685800" cy="475488"/>
+          </a:xfrm>
+          <a:prstGeom prst="rect">
+            <a:avLst/>
+          </a:prstGeom>
+          <a:noFill/>
+          <a:ln/>
+        </p:spPr>
+        <p:txBody>
+          <a:bodyPr wrap="square" lIns="0" tIns="0" rIns="0" bIns="0" rtlCol="0" anchor="ctr"/>
+          <a:lstStyle/>
+          <a:p>
+            <a:pPr algn="ctr" indent="0" marL="0">
+              <a:buNone/>
+            </a:pPr>
+            <a:r>
+              <a:rPr lang="en-US" sz="900" b="1" dirty="0">
+                <a:solidFill>
+                  <a:srgbClr val="9D174D"/>
+                </a:solidFill>
+                <a:latin typeface="Trebuchet MS" pitchFamily="34" charset="0"/>
+                <a:ea typeface="Trebuchet MS" pitchFamily="34" charset="-122"/>
+                <a:cs typeface="Trebuchet MS" pitchFamily="34" charset="-120"/>
+              </a:rPr>
+              <a:t>t</a:t>
             </a:r>
             <a:endParaRPr lang="en-US" sz="900" dirty="0"/>
           </a:p>
@@ -21934,7 +22276,7 @@
                 <a:ea typeface="Trebuchet MS" pitchFamily="34" charset="-122"/>
                 <a:cs typeface="Trebuchet MS" pitchFamily="34" charset="-120"/>
               </a:rPr>
-              <a:t>overturn</a:t>
+              <a:t>turning</a:t>
             </a:r>
             <a:endParaRPr lang="en-US" sz="2800" dirty="0"/>
           </a:p>
@@ -22761,7 +23103,7 @@
                 <a:ea typeface="Trebuchet MS" pitchFamily="34" charset="-122"/>
                 <a:cs typeface="Trebuchet MS" pitchFamily="34" charset="-120"/>
               </a:rPr>
-              <a:t>overturn</a:t>
+              <a:t>turning</a:t>
             </a:r>
             <a:endParaRPr lang="en-US" sz="2800" dirty="0"/>
           </a:p>
@@ -22850,11 +23192,11 @@
             </a:avLst>
           </a:prstGeom>
           <a:solidFill>
-            <a:srgbClr val="DDD6FE"/>
+            <a:srgbClr val="CCFBF1"/>
           </a:solidFill>
           <a:ln w="19050">
             <a:solidFill>
-              <a:srgbClr val="7C3AED"/>
+              <a:srgbClr val="0D9488"/>
             </a:solidFill>
             <a:prstDash val="solid"/>
           </a:ln>
@@ -22894,13 +23236,13 @@
             <a:r>
               <a:rPr lang="en-US" sz="1300" b="1" dirty="0">
                 <a:solidFill>
-                  <a:srgbClr val="4C1D95"/>
+                  <a:srgbClr val="0F766E"/>
                 </a:solidFill>
                 <a:latin typeface="Trebuchet MS" pitchFamily="34" charset="0"/>
                 <a:ea typeface="Trebuchet MS" pitchFamily="34" charset="-122"/>
                 <a:cs typeface="Trebuchet MS" pitchFamily="34" charset="-120"/>
               </a:rPr>
-              <a:t>over</a:t>
+              <a:t>turn</a:t>
             </a:r>
             <a:endParaRPr lang="en-US" sz="1300" dirty="0"/>
           </a:p>
@@ -22939,7 +23281,7 @@
                 <a:ea typeface="Calibri" pitchFamily="34" charset="-122"/>
                 <a:cs typeface="Calibri" pitchFamily="34" charset="-120"/>
               </a:rPr>
-              <a:t>above, across, too much</a:t>
+              <a:t>to rotate or change direction</a:t>
             </a:r>
             <a:endParaRPr lang="en-US" sz="850" dirty="0"/>
           </a:p>
@@ -22962,11 +23304,11 @@
             </a:avLst>
           </a:prstGeom>
           <a:solidFill>
-            <a:srgbClr val="CCFBF1"/>
+            <a:srgbClr val="FCE7F3"/>
           </a:solidFill>
           <a:ln w="19050">
             <a:solidFill>
-              <a:srgbClr val="0D9488"/>
+              <a:srgbClr val="DB2777"/>
             </a:solidFill>
             <a:prstDash val="solid"/>
           </a:ln>
@@ -23006,13 +23348,13 @@
             <a:r>
               <a:rPr lang="en-US" sz="1300" b="1" dirty="0">
                 <a:solidFill>
-                  <a:srgbClr val="0F766E"/>
+                  <a:srgbClr val="9D174D"/>
                 </a:solidFill>
                 <a:latin typeface="Trebuchet MS" pitchFamily="34" charset="0"/>
                 <a:ea typeface="Trebuchet MS" pitchFamily="34" charset="-122"/>
                 <a:cs typeface="Trebuchet MS" pitchFamily="34" charset="-120"/>
               </a:rPr>
-              <a:t>turn</a:t>
+              <a:t>ing</a:t>
             </a:r>
             <a:endParaRPr lang="en-US" sz="1300" dirty="0"/>
           </a:p>
@@ -23051,7 +23393,7 @@
                 <a:ea typeface="Calibri" pitchFamily="34" charset="-122"/>
                 <a:cs typeface="Calibri" pitchFamily="34" charset="-120"/>
               </a:rPr>
-              <a:t>to rotate or change direction</a:t>
+              <a:t>happening now or ongoing action</a:t>
             </a:r>
             <a:endParaRPr lang="en-US" sz="850" dirty="0"/>
           </a:p>
@@ -24465,7 +24807,7 @@
                 <a:ea typeface="Trebuchet MS" pitchFamily="34" charset="-122"/>
                 <a:cs typeface="Trebuchet MS" pitchFamily="34" charset="-120"/>
               </a:rPr>
-              <a:t>overturn</a:t>
+              <a:t>turning</a:t>
             </a:r>
             <a:endParaRPr lang="en-US" sz="2800" dirty="0"/>
           </a:p>
@@ -24554,11 +24896,11 @@
             </a:avLst>
           </a:prstGeom>
           <a:solidFill>
-            <a:srgbClr val="DDD6FE"/>
+            <a:srgbClr val="CCFBF1"/>
           </a:solidFill>
           <a:ln w="19050">
             <a:solidFill>
-              <a:srgbClr val="7C3AED"/>
+              <a:srgbClr val="0D9488"/>
             </a:solidFill>
             <a:prstDash val="solid"/>
           </a:ln>
@@ -24598,13 +24940,13 @@
             <a:r>
               <a:rPr lang="en-US" sz="1300" b="1" dirty="0">
                 <a:solidFill>
-                  <a:srgbClr val="4C1D95"/>
+                  <a:srgbClr val="0F766E"/>
                 </a:solidFill>
                 <a:latin typeface="Trebuchet MS" pitchFamily="34" charset="0"/>
                 <a:ea typeface="Trebuchet MS" pitchFamily="34" charset="-122"/>
                 <a:cs typeface="Trebuchet MS" pitchFamily="34" charset="-120"/>
               </a:rPr>
-              <a:t>over</a:t>
+              <a:t>turn</a:t>
             </a:r>
             <a:endParaRPr lang="en-US" sz="1300" dirty="0"/>
           </a:p>
@@ -24643,7 +24985,7 @@
                 <a:ea typeface="Calibri" pitchFamily="34" charset="-122"/>
                 <a:cs typeface="Calibri" pitchFamily="34" charset="-120"/>
               </a:rPr>
-              <a:t>above, across, too much</a:t>
+              <a:t>to rotate or change direction</a:t>
             </a:r>
             <a:endParaRPr lang="en-US" sz="850" dirty="0"/>
           </a:p>
@@ -24666,11 +25008,11 @@
             </a:avLst>
           </a:prstGeom>
           <a:solidFill>
-            <a:srgbClr val="CCFBF1"/>
+            <a:srgbClr val="FCE7F3"/>
           </a:solidFill>
           <a:ln w="19050">
             <a:solidFill>
-              <a:srgbClr val="0D9488"/>
+              <a:srgbClr val="DB2777"/>
             </a:solidFill>
             <a:prstDash val="solid"/>
           </a:ln>
@@ -24710,13 +25052,13 @@
             <a:r>
               <a:rPr lang="en-US" sz="1300" b="1" dirty="0">
                 <a:solidFill>
-                  <a:srgbClr val="0F766E"/>
+                  <a:srgbClr val="9D174D"/>
                 </a:solidFill>
                 <a:latin typeface="Trebuchet MS" pitchFamily="34" charset="0"/>
                 <a:ea typeface="Trebuchet MS" pitchFamily="34" charset="-122"/>
                 <a:cs typeface="Trebuchet MS" pitchFamily="34" charset="-120"/>
               </a:rPr>
-              <a:t>turn</a:t>
+              <a:t>ing</a:t>
             </a:r>
             <a:endParaRPr lang="en-US" sz="1300" dirty="0"/>
           </a:p>
@@ -24755,7 +25097,7 @@
                 <a:ea typeface="Calibri" pitchFamily="34" charset="-122"/>
                 <a:cs typeface="Calibri" pitchFamily="34" charset="-120"/>
               </a:rPr>
-              <a:t>to rotate or change direction</a:t>
+              <a:t>happening now or ongoing action</a:t>
             </a:r>
             <a:endParaRPr lang="en-US" sz="850" dirty="0"/>
           </a:p>
@@ -24862,7 +25204,7 @@
         </p:nvSpPr>
         <p:spPr>
           <a:xfrm>
-            <a:off x="2313432" y="3364992"/>
+            <a:off x="2999232" y="3364992"/>
             <a:ext cx="1645920" cy="475488"/>
           </a:xfrm>
           <a:prstGeom prst="rect">
@@ -24889,7 +25231,7 @@
         </p:nvSpPr>
         <p:spPr>
           <a:xfrm>
-            <a:off x="2313432" y="3364992"/>
+            <a:off x="2999232" y="3364992"/>
             <a:ext cx="1645920" cy="475488"/>
           </a:xfrm>
           <a:prstGeom prst="rect">
@@ -24914,7 +25256,7 @@
                 <a:ea typeface="Trebuchet MS" pitchFamily="34" charset="-122"/>
                 <a:cs typeface="Trebuchet MS" pitchFamily="34" charset="-120"/>
               </a:rPr>
-              <a:t>o</a:t>
+              <a:t>turn</a:t>
             </a:r>
             <a:endParaRPr lang="en-US" sz="1400" dirty="0"/>
           </a:p>
@@ -24928,8 +25270,8 @@
         </p:nvSpPr>
         <p:spPr>
           <a:xfrm>
-            <a:off x="3959352" y="3364992"/>
-            <a:ext cx="411480" cy="475488"/>
+            <a:off x="4645152" y="3364992"/>
+            <a:ext cx="1097280" cy="475488"/>
           </a:xfrm>
           <a:prstGeom prst="rect">
             <a:avLst/>
@@ -24967,7 +25309,7 @@
         </p:nvSpPr>
         <p:spPr>
           <a:xfrm>
-            <a:off x="4370832" y="3364992"/>
+            <a:off x="5742432" y="3364992"/>
             <a:ext cx="1645920" cy="475488"/>
           </a:xfrm>
           <a:prstGeom prst="rect">
@@ -24994,7 +25336,7 @@
         </p:nvSpPr>
         <p:spPr>
           <a:xfrm>
-            <a:off x="4370832" y="3364992"/>
+            <a:off x="5742432" y="3364992"/>
             <a:ext cx="1645920" cy="475488"/>
           </a:xfrm>
           <a:prstGeom prst="rect">
@@ -25019,7 +25361,7 @@
                 <a:ea typeface="Trebuchet MS" pitchFamily="34" charset="-122"/>
                 <a:cs typeface="Trebuchet MS" pitchFamily="34" charset="-120"/>
               </a:rPr>
-              <a:t>ver</a:t>
+              <a:t>ing</a:t>
             </a:r>
             <a:endParaRPr lang="en-US" sz="1400" dirty="0"/>
           </a:p>
@@ -25027,14 +25369,41 @@
       </p:sp>
       <p:sp>
         <p:nvSpPr>
-          <p:cNvPr id="30" name="Text 28"/>
-          <p:cNvSpPr/>
-          <p:nvPr/>
-        </p:nvSpPr>
-        <p:spPr>
-          <a:xfrm>
-            <a:off x="6016752" y="3364992"/>
-            <a:ext cx="411480" cy="475488"/>
+          <p:cNvPr id="30" name="Shape 28"/>
+          <p:cNvSpPr/>
+          <p:nvPr/>
+        </p:nvSpPr>
+        <p:spPr>
+          <a:xfrm>
+            <a:off x="365760" y="4096512"/>
+            <a:ext cx="1371600" cy="804672"/>
+          </a:xfrm>
+          <a:prstGeom prst="rect">
+            <a:avLst>
+              <a:gd name="adj" fmla="val 6818"/>
+            </a:avLst>
+          </a:prstGeom>
+          <a:solidFill>
+            <a:srgbClr val="E2E8F0"/>
+          </a:solidFill>
+          <a:ln w="12700">
+            <a:solidFill>
+              <a:srgbClr val="E2E8F0"/>
+            </a:solidFill>
+            <a:prstDash val="solid"/>
+          </a:ln>
+        </p:spPr>
+      </p:sp>
+      <p:sp>
+        <p:nvSpPr>
+          <p:cNvPr id="31" name="Text 29"/>
+          <p:cNvSpPr/>
+          <p:nvPr/>
+        </p:nvSpPr>
+        <p:spPr>
+          <a:xfrm>
+            <a:off x="365760" y="4096512"/>
+            <a:ext cx="1371600" cy="804672"/>
           </a:xfrm>
           <a:prstGeom prst="rect">
             <a:avLst/>
@@ -25050,96 +25419,30 @@
               <a:buNone/>
             </a:pPr>
             <a:r>
-              <a:rPr lang="en-US" sz="1600" b="1" dirty="0">
-                <a:solidFill>
-                  <a:srgbClr val="0D9488"/>
+              <a:rPr lang="en-US" sz="1100" b="1" dirty="0">
+                <a:solidFill>
+                  <a:srgbClr val="475569"/>
                 </a:solidFill>
                 <a:latin typeface="Trebuchet MS" pitchFamily="34" charset="0"/>
                 <a:ea typeface="Trebuchet MS" pitchFamily="34" charset="-122"/>
                 <a:cs typeface="Trebuchet MS" pitchFamily="34" charset="-120"/>
               </a:rPr>
-              <a:t>·</a:t>
-            </a:r>
-            <a:endParaRPr lang="en-US" sz="1600" dirty="0"/>
-          </a:p>
-        </p:txBody>
-      </p:sp>
-      <p:sp>
-        <p:nvSpPr>
-          <p:cNvPr id="31" name="Shape 29"/>
-          <p:cNvSpPr/>
-          <p:nvPr/>
-        </p:nvSpPr>
-        <p:spPr>
-          <a:xfrm>
-            <a:off x="6428232" y="3364992"/>
-            <a:ext cx="1645920" cy="475488"/>
-          </a:xfrm>
-          <a:prstGeom prst="rect">
-            <a:avLst>
-              <a:gd name="adj" fmla="val 9615"/>
-            </a:avLst>
-          </a:prstGeom>
-          <a:solidFill>
-            <a:srgbClr val="FFFFFF"/>
-          </a:solidFill>
-          <a:ln w="12700">
-            <a:solidFill>
-              <a:srgbClr val="0D9488"/>
-            </a:solidFill>
-            <a:prstDash val="solid"/>
-          </a:ln>
-        </p:spPr>
-      </p:sp>
-      <p:sp>
-        <p:nvSpPr>
-          <p:cNvPr id="32" name="Text 30"/>
-          <p:cNvSpPr/>
-          <p:nvPr/>
-        </p:nvSpPr>
-        <p:spPr>
-          <a:xfrm>
-            <a:off x="6428232" y="3364992"/>
-            <a:ext cx="1645920" cy="475488"/>
-          </a:xfrm>
-          <a:prstGeom prst="rect">
-            <a:avLst/>
-          </a:prstGeom>
-          <a:noFill/>
-          <a:ln/>
-        </p:spPr>
-        <p:txBody>
-          <a:bodyPr wrap="square" lIns="0" tIns="0" rIns="0" bIns="0" rtlCol="0" anchor="ctr"/>
-          <a:lstStyle/>
-          <a:p>
-            <a:pPr algn="ctr" indent="0" marL="0">
-              <a:buNone/>
-            </a:pPr>
-            <a:r>
-              <a:rPr lang="en-US" sz="1400" b="1" dirty="0">
-                <a:solidFill>
-                  <a:srgbClr val="0D9488"/>
-                </a:solidFill>
-                <a:latin typeface="Trebuchet MS" pitchFamily="34" charset="0"/>
-                <a:ea typeface="Trebuchet MS" pitchFamily="34" charset="-122"/>
-                <a:cs typeface="Trebuchet MS" pitchFamily="34" charset="-120"/>
-              </a:rPr>
-              <a:t>turn</a:t>
-            </a:r>
-            <a:endParaRPr lang="en-US" sz="1400" dirty="0"/>
-          </a:p>
-        </p:txBody>
-      </p:sp>
-      <p:sp>
-        <p:nvSpPr>
-          <p:cNvPr id="33" name="Shape 31"/>
-          <p:cNvSpPr/>
-          <p:nvPr/>
-        </p:nvSpPr>
-        <p:spPr>
-          <a:xfrm>
-            <a:off x="365760" y="4096512"/>
-            <a:ext cx="1371600" cy="804672"/>
+              <a:t>Phonemes</a:t>
+            </a:r>
+            <a:endParaRPr lang="en-US" sz="1100" dirty="0"/>
+          </a:p>
+        </p:txBody>
+      </p:sp>
+      <p:sp>
+        <p:nvSpPr>
+          <p:cNvPr id="32" name="Shape 30"/>
+          <p:cNvSpPr/>
+          <p:nvPr/>
+        </p:nvSpPr>
+        <p:spPr>
+          <a:xfrm>
+            <a:off x="1874520" y="4096512"/>
+            <a:ext cx="6903720" cy="804672"/>
           </a:xfrm>
           <a:prstGeom prst="rect">
             <a:avLst>
@@ -25147,85 +25450,19 @@
             </a:avLst>
           </a:prstGeom>
           <a:solidFill>
-            <a:srgbClr val="E2E8F0"/>
+            <a:srgbClr val="F8FAFC"/>
           </a:solidFill>
           <a:ln w="12700">
             <a:solidFill>
               <a:srgbClr val="E2E8F0"/>
             </a:solidFill>
-            <a:prstDash val="solid"/>
-          </a:ln>
-        </p:spPr>
-      </p:sp>
-      <p:sp>
-        <p:nvSpPr>
-          <p:cNvPr id="34" name="Text 32"/>
-          <p:cNvSpPr/>
-          <p:nvPr/>
-        </p:nvSpPr>
-        <p:spPr>
-          <a:xfrm>
-            <a:off x="365760" y="4096512"/>
-            <a:ext cx="1371600" cy="804672"/>
-          </a:xfrm>
-          <a:prstGeom prst="rect">
-            <a:avLst/>
-          </a:prstGeom>
-          <a:noFill/>
-          <a:ln/>
-        </p:spPr>
-        <p:txBody>
-          <a:bodyPr wrap="square" lIns="0" tIns="0" rIns="0" bIns="0" rtlCol="0" anchor="ctr"/>
-          <a:lstStyle/>
-          <a:p>
-            <a:pPr algn="ctr" indent="0" marL="0">
-              <a:buNone/>
-            </a:pPr>
-            <a:r>
-              <a:rPr lang="en-US" sz="1100" b="1" dirty="0">
-                <a:solidFill>
-                  <a:srgbClr val="475569"/>
-                </a:solidFill>
-                <a:latin typeface="Trebuchet MS" pitchFamily="34" charset="0"/>
-                <a:ea typeface="Trebuchet MS" pitchFamily="34" charset="-122"/>
-                <a:cs typeface="Trebuchet MS" pitchFamily="34" charset="-120"/>
-              </a:rPr>
-              <a:t>Phonemes</a:t>
-            </a:r>
-            <a:endParaRPr lang="en-US" sz="1100" dirty="0"/>
-          </a:p>
-        </p:txBody>
-      </p:sp>
-      <p:sp>
-        <p:nvSpPr>
-          <p:cNvPr id="35" name="Shape 33"/>
-          <p:cNvSpPr/>
-          <p:nvPr/>
-        </p:nvSpPr>
-        <p:spPr>
-          <a:xfrm>
-            <a:off x="1874520" y="4096512"/>
-            <a:ext cx="6903720" cy="804672"/>
-          </a:xfrm>
-          <a:prstGeom prst="rect">
-            <a:avLst>
-              <a:gd name="adj" fmla="val 6818"/>
-            </a:avLst>
-          </a:prstGeom>
-          <a:solidFill>
-            <a:srgbClr val="F8FAFC"/>
-          </a:solidFill>
-          <a:ln w="12700">
-            <a:solidFill>
-              <a:srgbClr val="E2E8F0"/>
-            </a:solidFill>
             <a:prstDash val="dash"/>
           </a:ln>
         </p:spPr>
       </p:sp>
       <p:sp>
         <p:nvSpPr>
-          <p:cNvPr id="36" name="Text 34"/>
+          <p:cNvPr id="33" name="Text 31"/>
           <p:cNvSpPr/>
           <p:nvPr/>
         </p:nvSpPr>
@@ -25687,7 +25924,7 @@
                 <a:ea typeface="Trebuchet MS" pitchFamily="34" charset="-122"/>
                 <a:cs typeface="Trebuchet MS" pitchFamily="34" charset="-120"/>
               </a:rPr>
-              <a:t>overturn</a:t>
+              <a:t>turning</a:t>
             </a:r>
             <a:endParaRPr lang="en-US" sz="2800" dirty="0"/>
           </a:p>
@@ -25776,11 +26013,11 @@
             </a:avLst>
           </a:prstGeom>
           <a:solidFill>
-            <a:srgbClr val="DDD6FE"/>
+            <a:srgbClr val="CCFBF1"/>
           </a:solidFill>
           <a:ln w="19050">
             <a:solidFill>
-              <a:srgbClr val="7C3AED"/>
+              <a:srgbClr val="0D9488"/>
             </a:solidFill>
             <a:prstDash val="solid"/>
           </a:ln>
@@ -25820,13 +26057,13 @@
             <a:r>
               <a:rPr lang="en-US" sz="1300" b="1" dirty="0">
                 <a:solidFill>
-                  <a:srgbClr val="4C1D95"/>
+                  <a:srgbClr val="0F766E"/>
                 </a:solidFill>
                 <a:latin typeface="Trebuchet MS" pitchFamily="34" charset="0"/>
                 <a:ea typeface="Trebuchet MS" pitchFamily="34" charset="-122"/>
                 <a:cs typeface="Trebuchet MS" pitchFamily="34" charset="-120"/>
               </a:rPr>
-              <a:t>over</a:t>
+              <a:t>turn</a:t>
             </a:r>
             <a:endParaRPr lang="en-US" sz="1300" dirty="0"/>
           </a:p>
@@ -25865,7 +26102,7 @@
                 <a:ea typeface="Calibri" pitchFamily="34" charset="-122"/>
                 <a:cs typeface="Calibri" pitchFamily="34" charset="-120"/>
               </a:rPr>
-              <a:t>above, across, too much</a:t>
+              <a:t>to rotate or change direction</a:t>
             </a:r>
             <a:endParaRPr lang="en-US" sz="850" dirty="0"/>
           </a:p>
@@ -25888,11 +26125,11 @@
             </a:avLst>
           </a:prstGeom>
           <a:solidFill>
-            <a:srgbClr val="CCFBF1"/>
+            <a:srgbClr val="FCE7F3"/>
           </a:solidFill>
           <a:ln w="19050">
             <a:solidFill>
-              <a:srgbClr val="0D9488"/>
+              <a:srgbClr val="DB2777"/>
             </a:solidFill>
             <a:prstDash val="solid"/>
           </a:ln>
@@ -25932,13 +26169,13 @@
             <a:r>
               <a:rPr lang="en-US" sz="1300" b="1" dirty="0">
                 <a:solidFill>
-                  <a:srgbClr val="0F766E"/>
+                  <a:srgbClr val="9D174D"/>
                 </a:solidFill>
                 <a:latin typeface="Trebuchet MS" pitchFamily="34" charset="0"/>
                 <a:ea typeface="Trebuchet MS" pitchFamily="34" charset="-122"/>
                 <a:cs typeface="Trebuchet MS" pitchFamily="34" charset="-120"/>
               </a:rPr>
-              <a:t>turn</a:t>
+              <a:t>ing</a:t>
             </a:r>
             <a:endParaRPr lang="en-US" sz="1300" dirty="0"/>
           </a:p>
@@ -25977,7 +26214,7 @@
                 <a:ea typeface="Calibri" pitchFamily="34" charset="-122"/>
                 <a:cs typeface="Calibri" pitchFamily="34" charset="-120"/>
               </a:rPr>
-              <a:t>to rotate or change direction</a:t>
+              <a:t>happening now or ongoing action</a:t>
             </a:r>
             <a:endParaRPr lang="en-US" sz="850" dirty="0"/>
           </a:p>
@@ -26084,7 +26321,7 @@
         </p:nvSpPr>
         <p:spPr>
           <a:xfrm>
-            <a:off x="2313432" y="3364992"/>
+            <a:off x="2999232" y="3364992"/>
             <a:ext cx="1645920" cy="475488"/>
           </a:xfrm>
           <a:prstGeom prst="rect">
@@ -26111,7 +26348,7 @@
         </p:nvSpPr>
         <p:spPr>
           <a:xfrm>
-            <a:off x="2313432" y="3364992"/>
+            <a:off x="2999232" y="3364992"/>
             <a:ext cx="1645920" cy="475488"/>
           </a:xfrm>
           <a:prstGeom prst="rect">
@@ -26136,7 +26373,7 @@
                 <a:ea typeface="Trebuchet MS" pitchFamily="34" charset="-122"/>
                 <a:cs typeface="Trebuchet MS" pitchFamily="34" charset="-120"/>
               </a:rPr>
-              <a:t>o</a:t>
+              <a:t>turn</a:t>
             </a:r>
             <a:endParaRPr lang="en-US" sz="1400" dirty="0"/>
           </a:p>
@@ -26150,8 +26387,8 @@
         </p:nvSpPr>
         <p:spPr>
           <a:xfrm>
-            <a:off x="3959352" y="3364992"/>
-            <a:ext cx="411480" cy="475488"/>
+            <a:off x="4645152" y="3364992"/>
+            <a:ext cx="1097280" cy="475488"/>
           </a:xfrm>
           <a:prstGeom prst="rect">
             <a:avLst/>
@@ -26189,7 +26426,7 @@
         </p:nvSpPr>
         <p:spPr>
           <a:xfrm>
-            <a:off x="4370832" y="3364992"/>
+            <a:off x="5742432" y="3364992"/>
             <a:ext cx="1645920" cy="475488"/>
           </a:xfrm>
           <a:prstGeom prst="rect">
@@ -26216,7 +26453,7 @@
         </p:nvSpPr>
         <p:spPr>
           <a:xfrm>
-            <a:off x="4370832" y="3364992"/>
+            <a:off x="5742432" y="3364992"/>
             <a:ext cx="1645920" cy="475488"/>
           </a:xfrm>
           <a:prstGeom prst="rect">
@@ -26241,7 +26478,7 @@
                 <a:ea typeface="Trebuchet MS" pitchFamily="34" charset="-122"/>
                 <a:cs typeface="Trebuchet MS" pitchFamily="34" charset="-120"/>
               </a:rPr>
-              <a:t>ver</a:t>
+              <a:t>ing</a:t>
             </a:r>
             <a:endParaRPr lang="en-US" sz="1400" dirty="0"/>
           </a:p>
@@ -26249,14 +26486,41 @@
       </p:sp>
       <p:sp>
         <p:nvSpPr>
-          <p:cNvPr id="30" name="Text 28"/>
-          <p:cNvSpPr/>
-          <p:nvPr/>
-        </p:nvSpPr>
-        <p:spPr>
-          <a:xfrm>
-            <a:off x="6016752" y="3364992"/>
-            <a:ext cx="411480" cy="475488"/>
+          <p:cNvPr id="30" name="Shape 28"/>
+          <p:cNvSpPr/>
+          <p:nvPr/>
+        </p:nvSpPr>
+        <p:spPr>
+          <a:xfrm>
+            <a:off x="365760" y="4096512"/>
+            <a:ext cx="1371600" cy="804672"/>
+          </a:xfrm>
+          <a:prstGeom prst="rect">
+            <a:avLst>
+              <a:gd name="adj" fmla="val 6818"/>
+            </a:avLst>
+          </a:prstGeom>
+          <a:solidFill>
+            <a:srgbClr val="E2E8F0"/>
+          </a:solidFill>
+          <a:ln w="12700">
+            <a:solidFill>
+              <a:srgbClr val="E2E8F0"/>
+            </a:solidFill>
+            <a:prstDash val="solid"/>
+          </a:ln>
+        </p:spPr>
+      </p:sp>
+      <p:sp>
+        <p:nvSpPr>
+          <p:cNvPr id="31" name="Text 29"/>
+          <p:cNvSpPr/>
+          <p:nvPr/>
+        </p:nvSpPr>
+        <p:spPr>
+          <a:xfrm>
+            <a:off x="365760" y="4096512"/>
+            <a:ext cx="1371600" cy="804672"/>
           </a:xfrm>
           <a:prstGeom prst="rect">
             <a:avLst/>
@@ -26272,57 +26536,84 @@
               <a:buNone/>
             </a:pPr>
             <a:r>
-              <a:rPr lang="en-US" sz="1600" b="1" dirty="0">
-                <a:solidFill>
-                  <a:srgbClr val="0D9488"/>
+              <a:rPr lang="en-US" sz="1100" b="1" dirty="0">
+                <a:solidFill>
+                  <a:srgbClr val="475569"/>
                 </a:solidFill>
                 <a:latin typeface="Trebuchet MS" pitchFamily="34" charset="0"/>
                 <a:ea typeface="Trebuchet MS" pitchFamily="34" charset="-122"/>
                 <a:cs typeface="Trebuchet MS" pitchFamily="34" charset="-120"/>
               </a:rPr>
-              <a:t>·</a:t>
-            </a:r>
-            <a:endParaRPr lang="en-US" sz="1600" dirty="0"/>
-          </a:p>
-        </p:txBody>
-      </p:sp>
-      <p:sp>
-        <p:nvSpPr>
-          <p:cNvPr id="31" name="Shape 29"/>
-          <p:cNvSpPr/>
-          <p:nvPr/>
-        </p:nvSpPr>
-        <p:spPr>
-          <a:xfrm>
-            <a:off x="6428232" y="3364992"/>
-            <a:ext cx="1645920" cy="475488"/>
+              <a:t>Phonemes</a:t>
+            </a:r>
+            <a:endParaRPr lang="en-US" sz="1100" dirty="0"/>
+          </a:p>
+        </p:txBody>
+      </p:sp>
+      <p:sp>
+        <p:nvSpPr>
+          <p:cNvPr id="32" name="Shape 30"/>
+          <p:cNvSpPr/>
+          <p:nvPr/>
+        </p:nvSpPr>
+        <p:spPr>
+          <a:xfrm>
+            <a:off x="1874520" y="4096512"/>
+            <a:ext cx="6903720" cy="658368"/>
           </a:xfrm>
           <a:prstGeom prst="rect">
             <a:avLst>
-              <a:gd name="adj" fmla="val 9615"/>
+              <a:gd name="adj" fmla="val 8333"/>
             </a:avLst>
           </a:prstGeom>
           <a:solidFill>
+            <a:srgbClr val="FCE7F3"/>
+          </a:solidFill>
+          <a:ln w="12700">
+            <a:solidFill>
+              <a:srgbClr val="DB2777"/>
+            </a:solidFill>
+            <a:prstDash val="solid"/>
+          </a:ln>
+        </p:spPr>
+      </p:sp>
+      <p:sp>
+        <p:nvSpPr>
+          <p:cNvPr id="33" name="Shape 31"/>
+          <p:cNvSpPr/>
+          <p:nvPr/>
+        </p:nvSpPr>
+        <p:spPr>
+          <a:xfrm>
+            <a:off x="2427732" y="4169664"/>
+            <a:ext cx="685800" cy="475488"/>
+          </a:xfrm>
+          <a:prstGeom prst="rect">
+            <a:avLst>
+              <a:gd name="adj" fmla="val 7692"/>
+            </a:avLst>
+          </a:prstGeom>
+          <a:solidFill>
             <a:srgbClr val="FFFFFF"/>
           </a:solidFill>
           <a:ln w="12700">
             <a:solidFill>
-              <a:srgbClr val="0D9488"/>
-            </a:solidFill>
-            <a:prstDash val="solid"/>
-          </a:ln>
-        </p:spPr>
-      </p:sp>
-      <p:sp>
-        <p:nvSpPr>
-          <p:cNvPr id="32" name="Text 30"/>
-          <p:cNvSpPr/>
-          <p:nvPr/>
-        </p:nvSpPr>
-        <p:spPr>
-          <a:xfrm>
-            <a:off x="6428232" y="3364992"/>
-            <a:ext cx="1645920" cy="475488"/>
+              <a:srgbClr val="DB2777"/>
+            </a:solidFill>
+            <a:prstDash val="solid"/>
+          </a:ln>
+        </p:spPr>
+      </p:sp>
+      <p:sp>
+        <p:nvSpPr>
+          <p:cNvPr id="34" name="Text 32"/>
+          <p:cNvSpPr/>
+          <p:nvPr/>
+        </p:nvSpPr>
+        <p:spPr>
+          <a:xfrm>
+            <a:off x="2427732" y="4169664"/>
+            <a:ext cx="685800" cy="475488"/>
           </a:xfrm>
           <a:prstGeom prst="rect">
             <a:avLst/>
@@ -26338,57 +26629,57 @@
               <a:buNone/>
             </a:pPr>
             <a:r>
-              <a:rPr lang="en-US" sz="1400" b="1" dirty="0">
-                <a:solidFill>
-                  <a:srgbClr val="0D9488"/>
+              <a:rPr lang="en-US" sz="900" b="1" dirty="0">
+                <a:solidFill>
+                  <a:srgbClr val="9D174D"/>
                 </a:solidFill>
                 <a:latin typeface="Trebuchet MS" pitchFamily="34" charset="0"/>
                 <a:ea typeface="Trebuchet MS" pitchFamily="34" charset="-122"/>
                 <a:cs typeface="Trebuchet MS" pitchFamily="34" charset="-120"/>
               </a:rPr>
-              <a:t>turn</a:t>
-            </a:r>
-            <a:endParaRPr lang="en-US" sz="1400" dirty="0"/>
-          </a:p>
-        </p:txBody>
-      </p:sp>
-      <p:sp>
-        <p:nvSpPr>
-          <p:cNvPr id="33" name="Shape 31"/>
-          <p:cNvSpPr/>
-          <p:nvPr/>
-        </p:nvSpPr>
-        <p:spPr>
-          <a:xfrm>
-            <a:off x="365760" y="4096512"/>
-            <a:ext cx="1371600" cy="804672"/>
+              <a:t>t</a:t>
+            </a:r>
+            <a:endParaRPr lang="en-US" sz="900" dirty="0"/>
+          </a:p>
+        </p:txBody>
+      </p:sp>
+      <p:sp>
+        <p:nvSpPr>
+          <p:cNvPr id="35" name="Shape 33"/>
+          <p:cNvSpPr/>
+          <p:nvPr/>
+        </p:nvSpPr>
+        <p:spPr>
+          <a:xfrm>
+            <a:off x="3639312" y="4169664"/>
+            <a:ext cx="685800" cy="475488"/>
           </a:xfrm>
           <a:prstGeom prst="rect">
             <a:avLst>
-              <a:gd name="adj" fmla="val 6818"/>
+              <a:gd name="adj" fmla="val 7692"/>
             </a:avLst>
           </a:prstGeom>
           <a:solidFill>
-            <a:srgbClr val="E2E8F0"/>
-          </a:solidFill>
-          <a:ln w="12700">
-            <a:solidFill>
-              <a:srgbClr val="E2E8F0"/>
-            </a:solidFill>
-            <a:prstDash val="solid"/>
-          </a:ln>
-        </p:spPr>
-      </p:sp>
-      <p:sp>
-        <p:nvSpPr>
-          <p:cNvPr id="34" name="Text 32"/>
-          <p:cNvSpPr/>
-          <p:nvPr/>
-        </p:nvSpPr>
-        <p:spPr>
-          <a:xfrm>
-            <a:off x="365760" y="4096512"/>
-            <a:ext cx="1371600" cy="804672"/>
+            <a:srgbClr val="FFFFFF"/>
+          </a:solidFill>
+          <a:ln w="12700">
+            <a:solidFill>
+              <a:srgbClr val="DB2777"/>
+            </a:solidFill>
+            <a:prstDash val="solid"/>
+          </a:ln>
+        </p:spPr>
+      </p:sp>
+      <p:sp>
+        <p:nvSpPr>
+          <p:cNvPr id="36" name="Text 34"/>
+          <p:cNvSpPr/>
+          <p:nvPr/>
+        </p:nvSpPr>
+        <p:spPr>
+          <a:xfrm>
+            <a:off x="3639312" y="4169664"/>
+            <a:ext cx="685800" cy="475488"/>
           </a:xfrm>
           <a:prstGeom prst="rect">
             <a:avLst/>
@@ -26404,56 +26695,29 @@
               <a:buNone/>
             </a:pPr>
             <a:r>
-              <a:rPr lang="en-US" sz="1100" b="1" dirty="0">
-                <a:solidFill>
-                  <a:srgbClr val="475569"/>
+              <a:rPr lang="en-US" sz="900" b="1" dirty="0">
+                <a:solidFill>
+                  <a:srgbClr val="9D174D"/>
                 </a:solidFill>
                 <a:latin typeface="Trebuchet MS" pitchFamily="34" charset="0"/>
                 <a:ea typeface="Trebuchet MS" pitchFamily="34" charset="-122"/>
                 <a:cs typeface="Trebuchet MS" pitchFamily="34" charset="-120"/>
               </a:rPr>
-              <a:t>Phonemes</a:t>
-            </a:r>
-            <a:endParaRPr lang="en-US" sz="1100" dirty="0"/>
-          </a:p>
-        </p:txBody>
-      </p:sp>
-      <p:sp>
-        <p:nvSpPr>
-          <p:cNvPr id="35" name="Shape 33"/>
-          <p:cNvSpPr/>
-          <p:nvPr/>
-        </p:nvSpPr>
-        <p:spPr>
-          <a:xfrm>
-            <a:off x="1874520" y="4096512"/>
-            <a:ext cx="6903720" cy="658368"/>
-          </a:xfrm>
-          <a:prstGeom prst="rect">
-            <a:avLst>
-              <a:gd name="adj" fmla="val 8333"/>
-            </a:avLst>
-          </a:prstGeom>
-          <a:solidFill>
-            <a:srgbClr val="FCE7F3"/>
-          </a:solidFill>
-          <a:ln w="12700">
-            <a:solidFill>
-              <a:srgbClr val="DB2777"/>
-            </a:solidFill>
-            <a:prstDash val="solid"/>
-          </a:ln>
-        </p:spPr>
-      </p:sp>
-      <p:sp>
-        <p:nvSpPr>
-          <p:cNvPr id="36" name="Shape 34"/>
-          <p:cNvSpPr/>
-          <p:nvPr/>
-        </p:nvSpPr>
-        <p:spPr>
-          <a:xfrm>
-            <a:off x="2254649" y="4169664"/>
+              <a:t>ur</a:t>
+            </a:r>
+            <a:endParaRPr lang="en-US" sz="900" dirty="0"/>
+          </a:p>
+        </p:txBody>
+      </p:sp>
+      <p:sp>
+        <p:nvSpPr>
+          <p:cNvPr id="37" name="Shape 35"/>
+          <p:cNvSpPr/>
+          <p:nvPr/>
+        </p:nvSpPr>
+        <p:spPr>
+          <a:xfrm>
+            <a:off x="4850892" y="4169664"/>
             <a:ext cx="685800" cy="475488"/>
           </a:xfrm>
           <a:prstGeom prst="rect">
@@ -26474,13 +26738,13 @@
       </p:sp>
       <p:sp>
         <p:nvSpPr>
-          <p:cNvPr id="37" name="Text 35"/>
-          <p:cNvSpPr/>
-          <p:nvPr/>
-        </p:nvSpPr>
-        <p:spPr>
-          <a:xfrm>
-            <a:off x="2254649" y="4169664"/>
+          <p:cNvPr id="38" name="Text 36"/>
+          <p:cNvSpPr/>
+          <p:nvPr/>
+        </p:nvSpPr>
+        <p:spPr>
+          <a:xfrm>
+            <a:off x="4850892" y="4169664"/>
             <a:ext cx="685800" cy="475488"/>
           </a:xfrm>
           <a:prstGeom prst="rect">
@@ -26505,7 +26769,7 @@
                 <a:ea typeface="Trebuchet MS" pitchFamily="34" charset="-122"/>
                 <a:cs typeface="Trebuchet MS" pitchFamily="34" charset="-120"/>
               </a:rPr>
-              <a:t>o</a:t>
+              <a:t>n</a:t>
             </a:r>
             <a:endParaRPr lang="en-US" sz="900" dirty="0"/>
           </a:p>
@@ -26513,13 +26777,13 @@
       </p:sp>
       <p:sp>
         <p:nvSpPr>
-          <p:cNvPr id="38" name="Shape 36"/>
-          <p:cNvSpPr/>
-          <p:nvPr/>
-        </p:nvSpPr>
-        <p:spPr>
-          <a:xfrm>
-            <a:off x="3293146" y="4169664"/>
+          <p:cNvPr id="39" name="Shape 37"/>
+          <p:cNvSpPr/>
+          <p:nvPr/>
+        </p:nvSpPr>
+        <p:spPr>
+          <a:xfrm>
+            <a:off x="6062472" y="4169664"/>
             <a:ext cx="685800" cy="475488"/>
           </a:xfrm>
           <a:prstGeom prst="rect">
@@ -26540,13 +26804,13 @@
       </p:sp>
       <p:sp>
         <p:nvSpPr>
-          <p:cNvPr id="39" name="Text 37"/>
-          <p:cNvSpPr/>
-          <p:nvPr/>
-        </p:nvSpPr>
-        <p:spPr>
-          <a:xfrm>
-            <a:off x="3293146" y="4169664"/>
+          <p:cNvPr id="40" name="Text 38"/>
+          <p:cNvSpPr/>
+          <p:nvPr/>
+        </p:nvSpPr>
+        <p:spPr>
+          <a:xfrm>
+            <a:off x="6062472" y="4169664"/>
             <a:ext cx="685800" cy="475488"/>
           </a:xfrm>
           <a:prstGeom prst="rect">
@@ -26571,7 +26835,7 @@
                 <a:ea typeface="Trebuchet MS" pitchFamily="34" charset="-122"/>
                 <a:cs typeface="Trebuchet MS" pitchFamily="34" charset="-120"/>
               </a:rPr>
-              <a:t>v</a:t>
+              <a:t>i</a:t>
             </a:r>
             <a:endParaRPr lang="en-US" sz="900" dirty="0"/>
           </a:p>
@@ -26579,13 +26843,13 @@
       </p:sp>
       <p:sp>
         <p:nvSpPr>
-          <p:cNvPr id="40" name="Shape 38"/>
-          <p:cNvSpPr/>
-          <p:nvPr/>
-        </p:nvSpPr>
-        <p:spPr>
-          <a:xfrm>
-            <a:off x="4331643" y="4169664"/>
+          <p:cNvPr id="41" name="Shape 39"/>
+          <p:cNvSpPr/>
+          <p:nvPr/>
+        </p:nvSpPr>
+        <p:spPr>
+          <a:xfrm>
+            <a:off x="7274052" y="4169664"/>
             <a:ext cx="685800" cy="475488"/>
           </a:xfrm>
           <a:prstGeom prst="rect">
@@ -26606,13 +26870,13 @@
       </p:sp>
       <p:sp>
         <p:nvSpPr>
-          <p:cNvPr id="41" name="Text 39"/>
-          <p:cNvSpPr/>
-          <p:nvPr/>
-        </p:nvSpPr>
-        <p:spPr>
-          <a:xfrm>
-            <a:off x="4331643" y="4169664"/>
+          <p:cNvPr id="42" name="Text 40"/>
+          <p:cNvSpPr/>
+          <p:nvPr/>
+        </p:nvSpPr>
+        <p:spPr>
+          <a:xfrm>
+            <a:off x="7274052" y="4169664"/>
             <a:ext cx="685800" cy="475488"/>
           </a:xfrm>
           <a:prstGeom prst="rect">
@@ -26637,205 +26901,7 @@
                 <a:ea typeface="Trebuchet MS" pitchFamily="34" charset="-122"/>
                 <a:cs typeface="Trebuchet MS" pitchFamily="34" charset="-120"/>
               </a:rPr>
-              <a:t>er</a:t>
-            </a:r>
-            <a:endParaRPr lang="en-US" sz="900" dirty="0"/>
-          </a:p>
-        </p:txBody>
-      </p:sp>
-      <p:sp>
-        <p:nvSpPr>
-          <p:cNvPr id="42" name="Shape 40"/>
-          <p:cNvSpPr/>
-          <p:nvPr/>
-        </p:nvSpPr>
-        <p:spPr>
-          <a:xfrm>
-            <a:off x="5370141" y="4169664"/>
-            <a:ext cx="685800" cy="475488"/>
-          </a:xfrm>
-          <a:prstGeom prst="rect">
-            <a:avLst>
-              <a:gd name="adj" fmla="val 7692"/>
-            </a:avLst>
-          </a:prstGeom>
-          <a:solidFill>
-            <a:srgbClr val="FFFFFF"/>
-          </a:solidFill>
-          <a:ln w="12700">
-            <a:solidFill>
-              <a:srgbClr val="DB2777"/>
-            </a:solidFill>
-            <a:prstDash val="solid"/>
-          </a:ln>
-        </p:spPr>
-      </p:sp>
-      <p:sp>
-        <p:nvSpPr>
-          <p:cNvPr id="43" name="Text 41"/>
-          <p:cNvSpPr/>
-          <p:nvPr/>
-        </p:nvSpPr>
-        <p:spPr>
-          <a:xfrm>
-            <a:off x="5370141" y="4169664"/>
-            <a:ext cx="685800" cy="475488"/>
-          </a:xfrm>
-          <a:prstGeom prst="rect">
-            <a:avLst/>
-          </a:prstGeom>
-          <a:noFill/>
-          <a:ln/>
-        </p:spPr>
-        <p:txBody>
-          <a:bodyPr wrap="square" lIns="0" tIns="0" rIns="0" bIns="0" rtlCol="0" anchor="ctr"/>
-          <a:lstStyle/>
-          <a:p>
-            <a:pPr algn="ctr" indent="0" marL="0">
-              <a:buNone/>
-            </a:pPr>
-            <a:r>
-              <a:rPr lang="en-US" sz="900" b="1" dirty="0">
-                <a:solidFill>
-                  <a:srgbClr val="9D174D"/>
-                </a:solidFill>
-                <a:latin typeface="Trebuchet MS" pitchFamily="34" charset="0"/>
-                <a:ea typeface="Trebuchet MS" pitchFamily="34" charset="-122"/>
-                <a:cs typeface="Trebuchet MS" pitchFamily="34" charset="-120"/>
-              </a:rPr>
-              <a:t>t</a:t>
-            </a:r>
-            <a:endParaRPr lang="en-US" sz="900" dirty="0"/>
-          </a:p>
-        </p:txBody>
-      </p:sp>
-      <p:sp>
-        <p:nvSpPr>
-          <p:cNvPr id="44" name="Shape 42"/>
-          <p:cNvSpPr/>
-          <p:nvPr/>
-        </p:nvSpPr>
-        <p:spPr>
-          <a:xfrm>
-            <a:off x="6408638" y="4169664"/>
-            <a:ext cx="685800" cy="475488"/>
-          </a:xfrm>
-          <a:prstGeom prst="rect">
-            <a:avLst>
-              <a:gd name="adj" fmla="val 7692"/>
-            </a:avLst>
-          </a:prstGeom>
-          <a:solidFill>
-            <a:srgbClr val="FFFFFF"/>
-          </a:solidFill>
-          <a:ln w="12700">
-            <a:solidFill>
-              <a:srgbClr val="DB2777"/>
-            </a:solidFill>
-            <a:prstDash val="solid"/>
-          </a:ln>
-        </p:spPr>
-      </p:sp>
-      <p:sp>
-        <p:nvSpPr>
-          <p:cNvPr id="45" name="Text 43"/>
-          <p:cNvSpPr/>
-          <p:nvPr/>
-        </p:nvSpPr>
-        <p:spPr>
-          <a:xfrm>
-            <a:off x="6408638" y="4169664"/>
-            <a:ext cx="685800" cy="475488"/>
-          </a:xfrm>
-          <a:prstGeom prst="rect">
-            <a:avLst/>
-          </a:prstGeom>
-          <a:noFill/>
-          <a:ln/>
-        </p:spPr>
-        <p:txBody>
-          <a:bodyPr wrap="square" lIns="0" tIns="0" rIns="0" bIns="0" rtlCol="0" anchor="ctr"/>
-          <a:lstStyle/>
-          <a:p>
-            <a:pPr algn="ctr" indent="0" marL="0">
-              <a:buNone/>
-            </a:pPr>
-            <a:r>
-              <a:rPr lang="en-US" sz="900" b="1" dirty="0">
-                <a:solidFill>
-                  <a:srgbClr val="9D174D"/>
-                </a:solidFill>
-                <a:latin typeface="Trebuchet MS" pitchFamily="34" charset="0"/>
-                <a:ea typeface="Trebuchet MS" pitchFamily="34" charset="-122"/>
-                <a:cs typeface="Trebuchet MS" pitchFamily="34" charset="-120"/>
-              </a:rPr>
-              <a:t>ur</a:t>
-            </a:r>
-            <a:endParaRPr lang="en-US" sz="900" dirty="0"/>
-          </a:p>
-        </p:txBody>
-      </p:sp>
-      <p:sp>
-        <p:nvSpPr>
-          <p:cNvPr id="46" name="Shape 44"/>
-          <p:cNvSpPr/>
-          <p:nvPr/>
-        </p:nvSpPr>
-        <p:spPr>
-          <a:xfrm>
-            <a:off x="7447135" y="4169664"/>
-            <a:ext cx="685800" cy="475488"/>
-          </a:xfrm>
-          <a:prstGeom prst="rect">
-            <a:avLst>
-              <a:gd name="adj" fmla="val 7692"/>
-            </a:avLst>
-          </a:prstGeom>
-          <a:solidFill>
-            <a:srgbClr val="FFFFFF"/>
-          </a:solidFill>
-          <a:ln w="12700">
-            <a:solidFill>
-              <a:srgbClr val="DB2777"/>
-            </a:solidFill>
-            <a:prstDash val="solid"/>
-          </a:ln>
-        </p:spPr>
-      </p:sp>
-      <p:sp>
-        <p:nvSpPr>
-          <p:cNvPr id="47" name="Text 45"/>
-          <p:cNvSpPr/>
-          <p:nvPr/>
-        </p:nvSpPr>
-        <p:spPr>
-          <a:xfrm>
-            <a:off x="7447135" y="4169664"/>
-            <a:ext cx="685800" cy="475488"/>
-          </a:xfrm>
-          <a:prstGeom prst="rect">
-            <a:avLst/>
-          </a:prstGeom>
-          <a:noFill/>
-          <a:ln/>
-        </p:spPr>
-        <p:txBody>
-          <a:bodyPr wrap="square" lIns="0" tIns="0" rIns="0" bIns="0" rtlCol="0" anchor="ctr"/>
-          <a:lstStyle/>
-          <a:p>
-            <a:pPr algn="ctr" indent="0" marL="0">
-              <a:buNone/>
-            </a:pPr>
-            <a:r>
-              <a:rPr lang="en-US" sz="900" b="1" dirty="0">
-                <a:solidFill>
-                  <a:srgbClr val="9D174D"/>
-                </a:solidFill>
-                <a:latin typeface="Trebuchet MS" pitchFamily="34" charset="0"/>
-                <a:ea typeface="Trebuchet MS" pitchFamily="34" charset="-122"/>
-                <a:cs typeface="Trebuchet MS" pitchFamily="34" charset="-120"/>
-              </a:rPr>
-              <a:t>n</a:t>
+              <a:t>ng</a:t>
             </a:r>
             <a:endParaRPr lang="en-US" sz="900" dirty="0"/>
           </a:p>
@@ -27266,7 +27332,7 @@
                 <a:ea typeface="Trebuchet MS" pitchFamily="34" charset="-122"/>
                 <a:cs typeface="Trebuchet MS" pitchFamily="34" charset="-120"/>
               </a:rPr>
-              <a:t>return</a:t>
+              <a:t>turner</a:t>
             </a:r>
             <a:endParaRPr lang="en-US" sz="2800" dirty="0"/>
           </a:p>
@@ -28093,7 +28159,7 @@
                 <a:ea typeface="Trebuchet MS" pitchFamily="34" charset="-122"/>
                 <a:cs typeface="Trebuchet MS" pitchFamily="34" charset="-120"/>
               </a:rPr>
-              <a:t>return</a:t>
+              <a:t>turner</a:t>
             </a:r>
             <a:endParaRPr lang="en-US" sz="2800" dirty="0"/>
           </a:p>
@@ -28182,11 +28248,11 @@
             </a:avLst>
           </a:prstGeom>
           <a:solidFill>
-            <a:srgbClr val="DDD6FE"/>
+            <a:srgbClr val="CCFBF1"/>
           </a:solidFill>
           <a:ln w="19050">
             <a:solidFill>
-              <a:srgbClr val="7C3AED"/>
+              <a:srgbClr val="0D9488"/>
             </a:solidFill>
             <a:prstDash val="solid"/>
           </a:ln>
@@ -28226,13 +28292,13 @@
             <a:r>
               <a:rPr lang="en-US" sz="1300" b="1" dirty="0">
                 <a:solidFill>
-                  <a:srgbClr val="4C1D95"/>
+                  <a:srgbClr val="0F766E"/>
                 </a:solidFill>
                 <a:latin typeface="Trebuchet MS" pitchFamily="34" charset="0"/>
                 <a:ea typeface="Trebuchet MS" pitchFamily="34" charset="-122"/>
                 <a:cs typeface="Trebuchet MS" pitchFamily="34" charset="-120"/>
               </a:rPr>
-              <a:t>re</a:t>
+              <a:t>turn</a:t>
             </a:r>
             <a:endParaRPr lang="en-US" sz="1300" dirty="0"/>
           </a:p>
@@ -28271,7 +28337,7 @@
                 <a:ea typeface="Calibri" pitchFamily="34" charset="-122"/>
                 <a:cs typeface="Calibri" pitchFamily="34" charset="-120"/>
               </a:rPr>
-              <a:t>again, back</a:t>
+              <a:t>to rotate or change direction</a:t>
             </a:r>
             <a:endParaRPr lang="en-US" sz="850" dirty="0"/>
           </a:p>
@@ -28294,11 +28360,11 @@
             </a:avLst>
           </a:prstGeom>
           <a:solidFill>
-            <a:srgbClr val="CCFBF1"/>
+            <a:srgbClr val="FCE7F3"/>
           </a:solidFill>
           <a:ln w="19050">
             <a:solidFill>
-              <a:srgbClr val="0D9488"/>
+              <a:srgbClr val="DB2777"/>
             </a:solidFill>
             <a:prstDash val="solid"/>
           </a:ln>
@@ -28338,13 +28404,13 @@
             <a:r>
               <a:rPr lang="en-US" sz="1300" b="1" dirty="0">
                 <a:solidFill>
-                  <a:srgbClr val="0F766E"/>
+                  <a:srgbClr val="9D174D"/>
                 </a:solidFill>
                 <a:latin typeface="Trebuchet MS" pitchFamily="34" charset="0"/>
                 <a:ea typeface="Trebuchet MS" pitchFamily="34" charset="-122"/>
                 <a:cs typeface="Trebuchet MS" pitchFamily="34" charset="-120"/>
               </a:rPr>
-              <a:t>turn</a:t>
+              <a:t>er</a:t>
             </a:r>
             <a:endParaRPr lang="en-US" sz="1300" dirty="0"/>
           </a:p>
@@ -28383,7 +28449,7 @@
                 <a:ea typeface="Calibri" pitchFamily="34" charset="-122"/>
                 <a:cs typeface="Calibri" pitchFamily="34" charset="-120"/>
               </a:rPr>
-              <a:t>to rotate or change direction</a:t>
+              <a:t>a person or thing that does something</a:t>
             </a:r>
             <a:endParaRPr lang="en-US" sz="850" dirty="0"/>
           </a:p>
@@ -29078,7 +29144,7 @@
                 <a:ea typeface="Trebuchet MS" pitchFamily="34" charset="-122"/>
                 <a:cs typeface="Trebuchet MS" pitchFamily="34" charset="-120"/>
               </a:rPr>
-              <a:t>return</a:t>
+              <a:t>turner</a:t>
             </a:r>
             <a:endParaRPr lang="en-US" sz="2800" dirty="0"/>
           </a:p>
@@ -29167,11 +29233,11 @@
             </a:avLst>
           </a:prstGeom>
           <a:solidFill>
-            <a:srgbClr val="DDD6FE"/>
+            <a:srgbClr val="CCFBF1"/>
           </a:solidFill>
           <a:ln w="19050">
             <a:solidFill>
-              <a:srgbClr val="7C3AED"/>
+              <a:srgbClr val="0D9488"/>
             </a:solidFill>
             <a:prstDash val="solid"/>
           </a:ln>
@@ -29211,13 +29277,13 @@
             <a:r>
               <a:rPr lang="en-US" sz="1300" b="1" dirty="0">
                 <a:solidFill>
-                  <a:srgbClr val="4C1D95"/>
+                  <a:srgbClr val="0F766E"/>
                 </a:solidFill>
                 <a:latin typeface="Trebuchet MS" pitchFamily="34" charset="0"/>
                 <a:ea typeface="Trebuchet MS" pitchFamily="34" charset="-122"/>
                 <a:cs typeface="Trebuchet MS" pitchFamily="34" charset="-120"/>
               </a:rPr>
-              <a:t>re</a:t>
+              <a:t>turn</a:t>
             </a:r>
             <a:endParaRPr lang="en-US" sz="1300" dirty="0"/>
           </a:p>
@@ -29256,7 +29322,7 @@
                 <a:ea typeface="Calibri" pitchFamily="34" charset="-122"/>
                 <a:cs typeface="Calibri" pitchFamily="34" charset="-120"/>
               </a:rPr>
-              <a:t>again, back</a:t>
+              <a:t>to rotate or change direction</a:t>
             </a:r>
             <a:endParaRPr lang="en-US" sz="850" dirty="0"/>
           </a:p>
@@ -29279,11 +29345,11 @@
             </a:avLst>
           </a:prstGeom>
           <a:solidFill>
-            <a:srgbClr val="CCFBF1"/>
+            <a:srgbClr val="FCE7F3"/>
           </a:solidFill>
           <a:ln w="19050">
             <a:solidFill>
-              <a:srgbClr val="0D9488"/>
+              <a:srgbClr val="DB2777"/>
             </a:solidFill>
             <a:prstDash val="solid"/>
           </a:ln>
@@ -29323,13 +29389,13 @@
             <a:r>
               <a:rPr lang="en-US" sz="1300" b="1" dirty="0">
                 <a:solidFill>
-                  <a:srgbClr val="0F766E"/>
+                  <a:srgbClr val="9D174D"/>
                 </a:solidFill>
                 <a:latin typeface="Trebuchet MS" pitchFamily="34" charset="0"/>
                 <a:ea typeface="Trebuchet MS" pitchFamily="34" charset="-122"/>
                 <a:cs typeface="Trebuchet MS" pitchFamily="34" charset="-120"/>
               </a:rPr>
-              <a:t>turn</a:t>
+              <a:t>er</a:t>
             </a:r>
             <a:endParaRPr lang="en-US" sz="1300" dirty="0"/>
           </a:p>
@@ -29368,7 +29434,7 @@
                 <a:ea typeface="Calibri" pitchFamily="34" charset="-122"/>
                 <a:cs typeface="Calibri" pitchFamily="34" charset="-120"/>
               </a:rPr>
-              <a:t>to rotate or change direction</a:t>
+              <a:t>a person or thing that does something</a:t>
             </a:r>
             <a:endParaRPr lang="en-US" sz="850" dirty="0"/>
           </a:p>
@@ -29527,7 +29593,7 @@
                 <a:ea typeface="Trebuchet MS" pitchFamily="34" charset="-122"/>
                 <a:cs typeface="Trebuchet MS" pitchFamily="34" charset="-120"/>
               </a:rPr>
-              <a:t>re</a:t>
+              <a:t>turn</a:t>
             </a:r>
             <a:endParaRPr lang="en-US" sz="1400" dirty="0"/>
           </a:p>
@@ -29632,7 +29698,7 @@
                 <a:ea typeface="Trebuchet MS" pitchFamily="34" charset="-122"/>
                 <a:cs typeface="Trebuchet MS" pitchFamily="34" charset="-120"/>
               </a:rPr>
-              <a:t>turn</a:t>
+              <a:t>er</a:t>
             </a:r>
             <a:endParaRPr lang="en-US" sz="1400" dirty="0"/>
           </a:p>
@@ -30195,7 +30261,7 @@
                 <a:ea typeface="Trebuchet MS" pitchFamily="34" charset="-122"/>
                 <a:cs typeface="Trebuchet MS" pitchFamily="34" charset="-120"/>
               </a:rPr>
-              <a:t>return</a:t>
+              <a:t>turner</a:t>
             </a:r>
             <a:endParaRPr lang="en-US" sz="2800" dirty="0"/>
           </a:p>
@@ -30284,11 +30350,11 @@
             </a:avLst>
           </a:prstGeom>
           <a:solidFill>
-            <a:srgbClr val="DDD6FE"/>
+            <a:srgbClr val="CCFBF1"/>
           </a:solidFill>
           <a:ln w="19050">
             <a:solidFill>
-              <a:srgbClr val="7C3AED"/>
+              <a:srgbClr val="0D9488"/>
             </a:solidFill>
             <a:prstDash val="solid"/>
           </a:ln>
@@ -30328,13 +30394,13 @@
             <a:r>
               <a:rPr lang="en-US" sz="1300" b="1" dirty="0">
                 <a:solidFill>
-                  <a:srgbClr val="4C1D95"/>
+                  <a:srgbClr val="0F766E"/>
                 </a:solidFill>
                 <a:latin typeface="Trebuchet MS" pitchFamily="34" charset="0"/>
                 <a:ea typeface="Trebuchet MS" pitchFamily="34" charset="-122"/>
                 <a:cs typeface="Trebuchet MS" pitchFamily="34" charset="-120"/>
               </a:rPr>
-              <a:t>re</a:t>
+              <a:t>turn</a:t>
             </a:r>
             <a:endParaRPr lang="en-US" sz="1300" dirty="0"/>
           </a:p>
@@ -30373,7 +30439,7 @@
                 <a:ea typeface="Calibri" pitchFamily="34" charset="-122"/>
                 <a:cs typeface="Calibri" pitchFamily="34" charset="-120"/>
               </a:rPr>
-              <a:t>again, back</a:t>
+              <a:t>to rotate or change direction</a:t>
             </a:r>
             <a:endParaRPr lang="en-US" sz="850" dirty="0"/>
           </a:p>
@@ -30396,11 +30462,11 @@
             </a:avLst>
           </a:prstGeom>
           <a:solidFill>
-            <a:srgbClr val="CCFBF1"/>
+            <a:srgbClr val="FCE7F3"/>
           </a:solidFill>
           <a:ln w="19050">
             <a:solidFill>
-              <a:srgbClr val="0D9488"/>
+              <a:srgbClr val="DB2777"/>
             </a:solidFill>
             <a:prstDash val="solid"/>
           </a:ln>
@@ -30440,13 +30506,13 @@
             <a:r>
               <a:rPr lang="en-US" sz="1300" b="1" dirty="0">
                 <a:solidFill>
-                  <a:srgbClr val="0F766E"/>
+                  <a:srgbClr val="9D174D"/>
                 </a:solidFill>
                 <a:latin typeface="Trebuchet MS" pitchFamily="34" charset="0"/>
                 <a:ea typeface="Trebuchet MS" pitchFamily="34" charset="-122"/>
                 <a:cs typeface="Trebuchet MS" pitchFamily="34" charset="-120"/>
               </a:rPr>
-              <a:t>turn</a:t>
+              <a:t>er</a:t>
             </a:r>
             <a:endParaRPr lang="en-US" sz="1300" dirty="0"/>
           </a:p>
@@ -30485,7 +30551,7 @@
                 <a:ea typeface="Calibri" pitchFamily="34" charset="-122"/>
                 <a:cs typeface="Calibri" pitchFamily="34" charset="-120"/>
               </a:rPr>
-              <a:t>to rotate or change direction</a:t>
+              <a:t>a person or thing that does something</a:t>
             </a:r>
             <a:endParaRPr lang="en-US" sz="850" dirty="0"/>
           </a:p>
@@ -30644,7 +30710,7 @@
                 <a:ea typeface="Trebuchet MS" pitchFamily="34" charset="-122"/>
                 <a:cs typeface="Trebuchet MS" pitchFamily="34" charset="-120"/>
               </a:rPr>
-              <a:t>re</a:t>
+              <a:t>turn</a:t>
             </a:r>
             <a:endParaRPr lang="en-US" sz="1400" dirty="0"/>
           </a:p>
@@ -30749,7 +30815,7 @@
                 <a:ea typeface="Trebuchet MS" pitchFamily="34" charset="-122"/>
                 <a:cs typeface="Trebuchet MS" pitchFamily="34" charset="-120"/>
               </a:rPr>
-              <a:t>turn</a:t>
+              <a:t>er</a:t>
             </a:r>
             <a:endParaRPr lang="en-US" sz="1400" dirty="0"/>
           </a:p>
@@ -30856,7 +30922,7 @@
         </p:nvSpPr>
         <p:spPr>
           <a:xfrm>
-            <a:off x="2427732" y="4169664"/>
+            <a:off x="2670048" y="4169664"/>
             <a:ext cx="685800" cy="475488"/>
           </a:xfrm>
           <a:prstGeom prst="rect">
@@ -30883,7 +30949,7 @@
         </p:nvSpPr>
         <p:spPr>
           <a:xfrm>
-            <a:off x="2427732" y="4169664"/>
+            <a:off x="2670048" y="4169664"/>
             <a:ext cx="685800" cy="475488"/>
           </a:xfrm>
           <a:prstGeom prst="rect">
@@ -30908,7 +30974,7 @@
                 <a:ea typeface="Trebuchet MS" pitchFamily="34" charset="-122"/>
                 <a:cs typeface="Trebuchet MS" pitchFamily="34" charset="-120"/>
               </a:rPr>
-              <a:t>r</a:t>
+              <a:t>t</a:t>
             </a:r>
             <a:endParaRPr lang="en-US" sz="900" dirty="0"/>
           </a:p>
@@ -30922,7 +30988,7 @@
         </p:nvSpPr>
         <p:spPr>
           <a:xfrm>
-            <a:off x="3639312" y="4169664"/>
+            <a:off x="4123944" y="4169664"/>
             <a:ext cx="685800" cy="475488"/>
           </a:xfrm>
           <a:prstGeom prst="rect">
@@ -30949,7 +31015,7 @@
         </p:nvSpPr>
         <p:spPr>
           <a:xfrm>
-            <a:off x="3639312" y="4169664"/>
+            <a:off x="4123944" y="4169664"/>
             <a:ext cx="685800" cy="475488"/>
           </a:xfrm>
           <a:prstGeom prst="rect">
@@ -30974,7 +31040,7 @@
                 <a:ea typeface="Trebuchet MS" pitchFamily="34" charset="-122"/>
                 <a:cs typeface="Trebuchet MS" pitchFamily="34" charset="-120"/>
               </a:rPr>
-              <a:t>e</a:t>
+              <a:t>ur</a:t>
             </a:r>
             <a:endParaRPr lang="en-US" sz="900" dirty="0"/>
           </a:p>
@@ -30988,7 +31054,7 @@
         </p:nvSpPr>
         <p:spPr>
           <a:xfrm>
-            <a:off x="4850892" y="4169664"/>
+            <a:off x="5577840" y="4169664"/>
             <a:ext cx="685800" cy="475488"/>
           </a:xfrm>
           <a:prstGeom prst="rect">
@@ -31015,7 +31081,7 @@
         </p:nvSpPr>
         <p:spPr>
           <a:xfrm>
-            <a:off x="4850892" y="4169664"/>
+            <a:off x="5577840" y="4169664"/>
             <a:ext cx="685800" cy="475488"/>
           </a:xfrm>
           <a:prstGeom prst="rect">
@@ -31040,7 +31106,7 @@
                 <a:ea typeface="Trebuchet MS" pitchFamily="34" charset="-122"/>
                 <a:cs typeface="Trebuchet MS" pitchFamily="34" charset="-120"/>
               </a:rPr>
-              <a:t>t</a:t>
+              <a:t>n</a:t>
             </a:r>
             <a:endParaRPr lang="en-US" sz="900" dirty="0"/>
           </a:p>
@@ -31054,7 +31120,7 @@
         </p:nvSpPr>
         <p:spPr>
           <a:xfrm>
-            <a:off x="6062472" y="4169664"/>
+            <a:off x="7031736" y="4169664"/>
             <a:ext cx="685800" cy="475488"/>
           </a:xfrm>
           <a:prstGeom prst="rect">
@@ -31081,7 +31147,7 @@
         </p:nvSpPr>
         <p:spPr>
           <a:xfrm>
-            <a:off x="6062472" y="4169664"/>
+            <a:off x="7031736" y="4169664"/>
             <a:ext cx="685800" cy="475488"/>
           </a:xfrm>
           <a:prstGeom prst="rect">
@@ -31106,73 +31172,7 @@
                 <a:ea typeface="Trebuchet MS" pitchFamily="34" charset="-122"/>
                 <a:cs typeface="Trebuchet MS" pitchFamily="34" charset="-120"/>
               </a:rPr>
-              <a:t>ur</a:t>
-            </a:r>
-            <a:endParaRPr lang="en-US" sz="900" dirty="0"/>
-          </a:p>
-        </p:txBody>
-      </p:sp>
-      <p:sp>
-        <p:nvSpPr>
-          <p:cNvPr id="41" name="Shape 39"/>
-          <p:cNvSpPr/>
-          <p:nvPr/>
-        </p:nvSpPr>
-        <p:spPr>
-          <a:xfrm>
-            <a:off x="7274052" y="4169664"/>
-            <a:ext cx="685800" cy="475488"/>
-          </a:xfrm>
-          <a:prstGeom prst="rect">
-            <a:avLst>
-              <a:gd name="adj" fmla="val 7692"/>
-            </a:avLst>
-          </a:prstGeom>
-          <a:solidFill>
-            <a:srgbClr val="FFFFFF"/>
-          </a:solidFill>
-          <a:ln w="12700">
-            <a:solidFill>
-              <a:srgbClr val="DB2777"/>
-            </a:solidFill>
-            <a:prstDash val="solid"/>
-          </a:ln>
-        </p:spPr>
-      </p:sp>
-      <p:sp>
-        <p:nvSpPr>
-          <p:cNvPr id="42" name="Text 40"/>
-          <p:cNvSpPr/>
-          <p:nvPr/>
-        </p:nvSpPr>
-        <p:spPr>
-          <a:xfrm>
-            <a:off x="7274052" y="4169664"/>
-            <a:ext cx="685800" cy="475488"/>
-          </a:xfrm>
-          <a:prstGeom prst="rect">
-            <a:avLst/>
-          </a:prstGeom>
-          <a:noFill/>
-          <a:ln/>
-        </p:spPr>
-        <p:txBody>
-          <a:bodyPr wrap="square" lIns="0" tIns="0" rIns="0" bIns="0" rtlCol="0" anchor="ctr"/>
-          <a:lstStyle/>
-          <a:p>
-            <a:pPr algn="ctr" indent="0" marL="0">
-              <a:buNone/>
-            </a:pPr>
-            <a:r>
-              <a:rPr lang="en-US" sz="900" b="1" dirty="0">
-                <a:solidFill>
-                  <a:srgbClr val="9D174D"/>
-                </a:solidFill>
-                <a:latin typeface="Trebuchet MS" pitchFamily="34" charset="0"/>
-                <a:ea typeface="Trebuchet MS" pitchFamily="34" charset="-122"/>
-                <a:cs typeface="Trebuchet MS" pitchFamily="34" charset="-120"/>
-              </a:rPr>
-              <a:t>n</a:t>
+              <a:t>er</a:t>
             </a:r>
             <a:endParaRPr lang="en-US" sz="900" dirty="0"/>
           </a:p>
@@ -33126,7 +33126,7 @@
                 <a:ea typeface="Trebuchet MS" pitchFamily="34" charset="-122"/>
                 <a:cs typeface="Trebuchet MS" pitchFamily="34" charset="-120"/>
               </a:rPr>
-              <a:t>up-</a:t>
+              <a:t>over-</a:t>
             </a:r>
             <a:endParaRPr lang="en-US" sz="1300" dirty="0"/>
           </a:p>
@@ -33279,7 +33279,7 @@
                 <a:ea typeface="Trebuchet MS" pitchFamily="34" charset="-122"/>
                 <a:cs typeface="Trebuchet MS" pitchFamily="34" charset="-120"/>
               </a:rPr>
-              <a:t>over-</a:t>
+              <a:t>up-</a:t>
             </a:r>
             <a:endParaRPr lang="en-US" sz="1300" dirty="0"/>
           </a:p>
@@ -33585,7 +33585,7 @@
                 <a:ea typeface="Trebuchet MS" pitchFamily="34" charset="-122"/>
                 <a:cs typeface="Trebuchet MS" pitchFamily="34" charset="-120"/>
               </a:rPr>
-              <a:t>in-</a:t>
+              <a:t>mis-</a:t>
             </a:r>
             <a:endParaRPr lang="en-US" sz="1300" dirty="0"/>
           </a:p>
@@ -33674,7 +33674,7 @@
                 <a:ea typeface="Trebuchet MS" pitchFamily="34" charset="-122"/>
                 <a:cs typeface="Trebuchet MS" pitchFamily="34" charset="-120"/>
               </a:rPr>
-              <a:t>-able</a:t>
+              <a:t>-ment</a:t>
             </a:r>
             <a:endParaRPr lang="en-US" sz="1300" dirty="0"/>
           </a:p>
@@ -33845,7 +33845,7 @@
                 <a:ea typeface="Trebuchet MS" pitchFamily="34" charset="-122"/>
                 <a:cs typeface="Trebuchet MS" pitchFamily="34" charset="-120"/>
               </a:rPr>
-              <a:t>upturn</a:t>
+              <a:t>overturn</a:t>
             </a:r>
             <a:endParaRPr lang="en-US" sz="1200" dirty="0"/>
           </a:p>
@@ -33911,7 +33911,7 @@
                 <a:ea typeface="Trebuchet MS" pitchFamily="34" charset="-122"/>
                 <a:cs typeface="Trebuchet MS" pitchFamily="34" charset="-120"/>
               </a:rPr>
-              <a:t>overturn</a:t>
+              <a:t>turnip</a:t>
             </a:r>
             <a:endParaRPr lang="en-US" sz="1200" dirty="0"/>
           </a:p>
@@ -33977,7 +33977,7 @@
                 <a:ea typeface="Trebuchet MS" pitchFamily="34" charset="-122"/>
                 <a:cs typeface="Trebuchet MS" pitchFamily="34" charset="-120"/>
               </a:rPr>
-              <a:t>turning</a:t>
+              <a:t>upturn</a:t>
             </a:r>
             <a:endParaRPr lang="en-US" sz="1200" dirty="0"/>
           </a:p>
@@ -34043,7 +34043,7 @@
                 <a:ea typeface="Trebuchet MS" pitchFamily="34" charset="-122"/>
                 <a:cs typeface="Trebuchet MS" pitchFamily="34" charset="-120"/>
               </a:rPr>
-              <a:t>turned</a:t>
+              <a:t>turner</a:t>
             </a:r>
             <a:endParaRPr lang="en-US" sz="1200" dirty="0"/>
           </a:p>
@@ -34109,7 +34109,7 @@
                 <a:ea typeface="Trebuchet MS" pitchFamily="34" charset="-122"/>
                 <a:cs typeface="Trebuchet MS" pitchFamily="34" charset="-120"/>
               </a:rPr>
-              <a:t>turner</a:t>
+              <a:t>turning</a:t>
             </a:r>
             <a:endParaRPr lang="en-US" sz="1200" dirty="0"/>
           </a:p>
@@ -34175,7 +34175,7 @@
                 <a:ea typeface="Trebuchet MS" pitchFamily="34" charset="-122"/>
                 <a:cs typeface="Trebuchet MS" pitchFamily="34" charset="-120"/>
               </a:rPr>
-              <a:t>outturn</a:t>
+              <a:t>turnout</a:t>
             </a:r>
             <a:endParaRPr lang="en-US" sz="1200" dirty="0"/>
           </a:p>
@@ -35429,7 +35429,7 @@
                 <a:ea typeface="Calibri" pitchFamily="34" charset="-122"/>
                 <a:cs typeface="Calibri" pitchFamily="34" charset="-120"/>
               </a:rPr>
-              <a:t>1.  The word 'return' contains the root 'turn' meaning to rotate or change direction.</a:t>
+              <a:t>1.  A 'turner' is someone or something that turns.</a:t>
             </a:r>
             <a:endParaRPr lang="en-US" sz="1300" dirty="0"/>
           </a:p>
@@ -35568,7 +35568,7 @@
                 <a:ea typeface="Calibri" pitchFamily="34" charset="-122"/>
                 <a:cs typeface="Calibri" pitchFamily="34" charset="-120"/>
               </a:rPr>
-              <a:t>2.  The prefix 're' in 'return' means forward or ahead.</a:t>
+              <a:t>2.  The root 'turn' comes from a Greek word meaning 'to spin gold'.</a:t>
             </a:r>
             <a:endParaRPr lang="en-US" sz="1300" dirty="0"/>
           </a:p>
@@ -35707,7 +35707,7 @@
                 <a:ea typeface="Calibri" pitchFamily="34" charset="-122"/>
                 <a:cs typeface="Calibri" pitchFamily="34" charset="-120"/>
               </a:rPr>
-              <a:t>3.  The word 'overturn' means to flip something upside down or reverse a decision.</a:t>
+              <a:t>3.  The word 'return' means to go back to where you started.</a:t>
             </a:r>
             <a:endParaRPr lang="en-US" sz="1300" dirty="0"/>
           </a:p>
@@ -35846,7 +35846,7 @@
                 <a:ea typeface="Calibri" pitchFamily="34" charset="-122"/>
                 <a:cs typeface="Calibri" pitchFamily="34" charset="-120"/>
               </a:rPr>
-              <a:t>4.  Words with the root 'turn' are related to movement or change of direction.</a:t>
+              <a:t>4.  The prefix 'mis' in a word always means 'again'.</a:t>
             </a:r>
             <a:endParaRPr lang="en-US" sz="1300" dirty="0"/>
           </a:p>
@@ -35869,11 +35869,11 @@
             </a:avLst>
           </a:prstGeom>
           <a:solidFill>
-            <a:srgbClr val="DCFCE7"/>
-          </a:solidFill>
-          <a:ln w="12700">
-            <a:solidFill>
-              <a:srgbClr val="16A34A"/>
+            <a:srgbClr val="FEE2E2"/>
+          </a:solidFill>
+          <a:ln w="12700">
+            <a:solidFill>
+              <a:srgbClr val="DC2626"/>
             </a:solidFill>
             <a:prstDash val="solid"/>
           </a:ln>
@@ -35906,13 +35906,13 @@
             <a:r>
               <a:rPr lang="en-US" sz="1100" b="1" dirty="0">
                 <a:solidFill>
-                  <a:srgbClr val="16A34A"/>
+                  <a:srgbClr val="DC2626"/>
                 </a:solidFill>
                 <a:latin typeface="Trebuchet MS" pitchFamily="34" charset="0"/>
                 <a:ea typeface="Trebuchet MS" pitchFamily="34" charset="-122"/>
                 <a:cs typeface="Trebuchet MS" pitchFamily="34" charset="-120"/>
               </a:rPr>
-              <a:t>TRUE</a:t>
+              <a:t>FALSE</a:t>
             </a:r>
             <a:endParaRPr lang="en-US" sz="1100" dirty="0"/>
           </a:p>
@@ -35985,7 +35985,7 @@
                 <a:ea typeface="Calibri" pitchFamily="34" charset="-122"/>
                 <a:cs typeface="Calibri" pitchFamily="34" charset="-120"/>
               </a:rPr>
-              <a:t>5.  The word 'turning' has no suffix added to the root 'turn'.</a:t>
+              <a:t>5.  The word 'overturn' contains the root 'turn'.</a:t>
             </a:r>
             <a:endParaRPr lang="en-US" sz="1300" dirty="0"/>
           </a:p>
@@ -36008,11 +36008,11 @@
             </a:avLst>
           </a:prstGeom>
           <a:solidFill>
-            <a:srgbClr val="FEE2E2"/>
-          </a:solidFill>
-          <a:ln w="12700">
-            <a:solidFill>
-              <a:srgbClr val="DC2626"/>
+            <a:srgbClr val="DCFCE7"/>
+          </a:solidFill>
+          <a:ln w="12700">
+            <a:solidFill>
+              <a:srgbClr val="16A34A"/>
             </a:solidFill>
             <a:prstDash val="solid"/>
           </a:ln>
@@ -36045,13 +36045,13 @@
             <a:r>
               <a:rPr lang="en-US" sz="1100" b="1" dirty="0">
                 <a:solidFill>
-                  <a:srgbClr val="DC2626"/>
+                  <a:srgbClr val="16A34A"/>
                 </a:solidFill>
                 <a:latin typeface="Trebuchet MS" pitchFamily="34" charset="0"/>
                 <a:ea typeface="Trebuchet MS" pitchFamily="34" charset="-122"/>
                 <a:cs typeface="Trebuchet MS" pitchFamily="34" charset="-120"/>
               </a:rPr>
-              <a:t>FALSE</a:t>
+              <a:t>TRUE</a:t>
             </a:r>
             <a:endParaRPr lang="en-US" sz="1100" dirty="0"/>
           </a:p>
@@ -36690,7 +36690,7 @@
                 <a:ea typeface="Trebuchet MS" pitchFamily="34" charset="-122"/>
                 <a:cs typeface="Trebuchet MS" pitchFamily="34" charset="-120"/>
               </a:rPr>
-              <a:t>upturn</a:t>
+              <a:t>overturn</a:t>
             </a:r>
             <a:endParaRPr lang="en-US" sz="1300" dirty="0"/>
           </a:p>
@@ -36756,7 +36756,7 @@
                 <a:ea typeface="Trebuchet MS" pitchFamily="34" charset="-122"/>
                 <a:cs typeface="Trebuchet MS" pitchFamily="34" charset="-120"/>
               </a:rPr>
-              <a:t>overturn</a:t>
+              <a:t>turnip</a:t>
             </a:r>
             <a:endParaRPr lang="en-US" sz="1300" dirty="0"/>
           </a:p>
@@ -36822,7 +36822,7 @@
                 <a:ea typeface="Trebuchet MS" pitchFamily="34" charset="-122"/>
                 <a:cs typeface="Trebuchet MS" pitchFamily="34" charset="-120"/>
               </a:rPr>
-              <a:t>turning</a:t>
+              <a:t>upturn</a:t>
             </a:r>
             <a:endParaRPr lang="en-US" sz="1300" dirty="0"/>
           </a:p>
@@ -36888,7 +36888,7 @@
                 <a:ea typeface="Trebuchet MS" pitchFamily="34" charset="-122"/>
                 <a:cs typeface="Trebuchet MS" pitchFamily="34" charset="-120"/>
               </a:rPr>
-              <a:t>turned</a:t>
+              <a:t>turner</a:t>
             </a:r>
             <a:endParaRPr lang="en-US" sz="1300" dirty="0"/>
           </a:p>
@@ -36954,7 +36954,7 @@
                 <a:ea typeface="Trebuchet MS" pitchFamily="34" charset="-122"/>
                 <a:cs typeface="Trebuchet MS" pitchFamily="34" charset="-120"/>
               </a:rPr>
-              <a:t>turner</a:t>
+              <a:t>turning</a:t>
             </a:r>
             <a:endParaRPr lang="en-US" sz="1300" dirty="0"/>
           </a:p>
@@ -37020,7 +37020,7 @@
                 <a:ea typeface="Trebuchet MS" pitchFamily="34" charset="-122"/>
                 <a:cs typeface="Trebuchet MS" pitchFamily="34" charset="-120"/>
               </a:rPr>
-              <a:t>outturn</a:t>
+              <a:t>turnout</a:t>
             </a:r>
             <a:endParaRPr lang="en-US" sz="1300" dirty="0"/>
           </a:p>
@@ -37805,7 +37805,7 @@
                 <a:ea typeface="Trebuchet MS" pitchFamily="34" charset="-122"/>
                 <a:cs typeface="Trebuchet MS" pitchFamily="34" charset="-120"/>
               </a:rPr>
-              <a:t>up-</a:t>
+              <a:t>over-</a:t>
             </a:r>
             <a:endParaRPr lang="en-US" sz="1300" dirty="0"/>
           </a:p>
@@ -37958,7 +37958,7 @@
                 <a:ea typeface="Trebuchet MS" pitchFamily="34" charset="-122"/>
                 <a:cs typeface="Trebuchet MS" pitchFamily="34" charset="-120"/>
               </a:rPr>
-              <a:t>over-</a:t>
+              <a:t>up-</a:t>
             </a:r>
             <a:endParaRPr lang="en-US" sz="1300" dirty="0"/>
           </a:p>
@@ -38264,7 +38264,7 @@
                 <a:ea typeface="Trebuchet MS" pitchFamily="34" charset="-122"/>
                 <a:cs typeface="Trebuchet MS" pitchFamily="34" charset="-120"/>
               </a:rPr>
-              <a:t>in-</a:t>
+              <a:t>mis-</a:t>
             </a:r>
             <a:endParaRPr lang="en-US" sz="1300" dirty="0"/>
           </a:p>
@@ -38353,7 +38353,7 @@
                 <a:ea typeface="Trebuchet MS" pitchFamily="34" charset="-122"/>
                 <a:cs typeface="Trebuchet MS" pitchFamily="34" charset="-120"/>
               </a:rPr>
-              <a:t>-able</a:t>
+              <a:t>-ment</a:t>
             </a:r>
             <a:endParaRPr lang="en-US" sz="1300" dirty="0"/>
           </a:p>
@@ -39264,7 +39264,7 @@
                 <a:ea typeface="Calibri" pitchFamily="34" charset="-122"/>
                 <a:cs typeface="Calibri" pitchFamily="34" charset="-120"/>
               </a:rPr>
-              <a:t>To go back to a place or give something back to where it came from.</a:t>
+              <a:t>To go back or come back to a place you were before.</a:t>
             </a:r>
             <a:endParaRPr lang="en-US" sz="1200" dirty="0"/>
           </a:p>
@@ -39337,7 +39337,7 @@
                 <a:ea typeface="Trebuchet MS" pitchFamily="34" charset="-122"/>
                 <a:cs typeface="Trebuchet MS" pitchFamily="34" charset="-120"/>
               </a:rPr>
-              <a:t>upturn</a:t>
+              <a:t>overturn</a:t>
             </a:r>
             <a:endParaRPr lang="en-US" sz="1200" dirty="0"/>
           </a:p>
@@ -39403,7 +39403,7 @@
                 <a:ea typeface="Calibri" pitchFamily="34" charset="-122"/>
                 <a:cs typeface="Calibri" pitchFamily="34" charset="-120"/>
               </a:rPr>
-              <a:t>To flip something upside down, or to change a decision that was already made.</a:t>
+              <a:t>A round white vegetable that grows underground.</a:t>
             </a:r>
             <a:endParaRPr lang="en-US" sz="1200" dirty="0"/>
           </a:p>
@@ -39476,7 +39476,7 @@
                 <a:ea typeface="Trebuchet MS" pitchFamily="34" charset="-122"/>
                 <a:cs typeface="Trebuchet MS" pitchFamily="34" charset="-120"/>
               </a:rPr>
-              <a:t>overturn</a:t>
+              <a:t>turnip</a:t>
             </a:r>
             <a:endParaRPr lang="en-US" sz="1200" dirty="0"/>
           </a:p>
@@ -39542,7 +39542,7 @@
                 <a:ea typeface="Calibri" pitchFamily="34" charset="-122"/>
                 <a:cs typeface="Calibri" pitchFamily="34" charset="-120"/>
               </a:rPr>
-              <a:t>A person or tool that turns things around.</a:t>
+              <a:t>Moving around in a circle or changing direction.</a:t>
             </a:r>
             <a:endParaRPr lang="en-US" sz="1200" dirty="0"/>
           </a:p>
@@ -39615,7 +39615,7 @@
                 <a:ea typeface="Trebuchet MS" pitchFamily="34" charset="-122"/>
                 <a:cs typeface="Trebuchet MS" pitchFamily="34" charset="-120"/>
               </a:rPr>
-              <a:t>turning</a:t>
+              <a:t>upturn</a:t>
             </a:r>
             <a:endParaRPr lang="en-US" sz="1200" dirty="0"/>
           </a:p>
@@ -39681,7 +39681,7 @@
                 <a:ea typeface="Calibri" pitchFamily="34" charset="-122"/>
                 <a:cs typeface="Calibri" pitchFamily="34" charset="-120"/>
               </a:rPr>
-              <a:t>The act of moving around in a circle or changing direction.</a:t>
+              <a:t>When something improves or starts going in a better direction.</a:t>
             </a:r>
             <a:endParaRPr lang="en-US" sz="1200" dirty="0"/>
           </a:p>
@@ -39754,7 +39754,7 @@
                 <a:ea typeface="Trebuchet MS" pitchFamily="34" charset="-122"/>
                 <a:cs typeface="Trebuchet MS" pitchFamily="34" charset="-120"/>
               </a:rPr>
-              <a:t>turned</a:t>
+              <a:t>turner</a:t>
             </a:r>
             <a:endParaRPr lang="en-US" sz="1200" dirty="0"/>
           </a:p>
@@ -39820,7 +39820,7 @@
                 <a:ea typeface="Calibri" pitchFamily="34" charset="-122"/>
                 <a:cs typeface="Calibri" pitchFamily="34" charset="-120"/>
               </a:rPr>
-              <a:t>When something already moved around or changed direction in the past.</a:t>
+              <a:t>A person or tool that turns things around.</a:t>
             </a:r>
             <a:endParaRPr lang="en-US" sz="1200" dirty="0"/>
           </a:p>
@@ -39893,7 +39893,7 @@
                 <a:ea typeface="Trebuchet MS" pitchFamily="34" charset="-122"/>
                 <a:cs typeface="Trebuchet MS" pitchFamily="34" charset="-120"/>
               </a:rPr>
-              <a:t>turner</a:t>
+              <a:t>turning</a:t>
             </a:r>
             <a:endParaRPr lang="en-US" sz="1200" dirty="0"/>
           </a:p>
@@ -39959,7 +39959,7 @@
                 <a:ea typeface="Calibri" pitchFamily="34" charset="-122"/>
                 <a:cs typeface="Calibri" pitchFamily="34" charset="-120"/>
               </a:rPr>
-              <a:t>The total amount of something that is produced or comes out at the end.</a:t>
+              <a:t>The number of people who show up to an event.</a:t>
             </a:r>
             <a:endParaRPr lang="en-US" sz="1200" dirty="0"/>
           </a:p>
@@ -40032,7 +40032,7 @@
                 <a:ea typeface="Trebuchet MS" pitchFamily="34" charset="-122"/>
                 <a:cs typeface="Trebuchet MS" pitchFamily="34" charset="-120"/>
               </a:rPr>
-              <a:t>outturn</a:t>
+              <a:t>turnout</a:t>
             </a:r>
             <a:endParaRPr lang="en-US" sz="1200" dirty="0"/>
           </a:p>
@@ -40098,7 +40098,7 @@
                 <a:ea typeface="Calibri" pitchFamily="34" charset="-122"/>
                 <a:cs typeface="Calibri" pitchFamily="34" charset="-120"/>
               </a:rPr>
-              <a:t>When something improves or moves upward after being down.</a:t>
+              <a:t>To flip something upside down or knock it over.</a:t>
             </a:r>
             <a:endParaRPr lang="en-US" sz="1200" dirty="0"/>
           </a:p>
@@ -40593,7 +40593,7 @@
                 <a:ea typeface="Calibri" pitchFamily="34" charset="-122"/>
                 <a:cs typeface="Calibri" pitchFamily="34" charset="-120"/>
               </a:rPr>
-              <a:t>After the holidays, we were excited to return to school and see our friends again.</a:t>
+              <a:t>The gymnast made a spectacular return to the competition after recovering from her injury.</a:t>
             </a:r>
             <a:endParaRPr lang="en-US" sz="1500" dirty="0"/>
           </a:p>
@@ -40757,7 +40757,7 @@
                 <a:ea typeface="Calibri" pitchFamily="34" charset="-122"/>
                 <a:cs typeface="Calibri" pitchFamily="34" charset="-120"/>
               </a:rPr>
-              <a:t>The gymnast made a sharp turning movement and landed perfectly on the mat.</a:t>
+              <a:t>The strong wind caused the small boat to overturn in the middle of the lake.</a:t>
             </a:r>
             <a:endParaRPr lang="en-US" sz="1500" dirty="0"/>
           </a:p>
@@ -40921,7 +40921,7 @@
                 <a:ea typeface="Calibri" pitchFamily="34" charset="-122"/>
                 <a:cs typeface="Calibri" pitchFamily="34" charset="-120"/>
               </a:rPr>
-              <a:t>The judge decided to overturn the earlier decision after hearing new information.</a:t>
+              <a:t>There was a huge turnout at the school fete, with hundreds of families attending.</a:t>
             </a:r>
             <a:endParaRPr lang="en-US" sz="1500" dirty="0"/>
           </a:p>
